--- a/presentation/vibe-vs-verified.pptx
+++ b/presentation/vibe-vs-verified.pptx
@@ -133,14 +133,14 @@
   <p:extLst>
     <p:ext uri="{521415D9-36F7-43E2-AB2F-B90AF26B5E84}">
       <p14:sectionLst xmlns:p14="http://schemas.microsoft.com/office/powerpoint/2010/main">
-        <p14:section name="Open" id="{3d0c924d-11d9-5ca4-423e-8113d0272fb0}">
+        <p14:section name="Open" id="{c7f3685e-0c56-5faf-a489-838b025888e1}">
           <p14:sldIdLst>
             <p14:sldId id="256"/>
             <p14:sldId id="257"/>
             <p14:sldId id="258"/>
           </p14:sldIdLst>
         </p14:section>
-        <p14:section name="Theory 1 - Context" id="{61bd1880-334b-a258-c830-1b935876b19e}">
+        <p14:section name="Theory 1 - Context" id="{a66c730b-b8db-2779-b6f9-275b1d268242}">
           <p14:sldIdLst>
             <p14:sldId id="259"/>
             <p14:sldId id="260"/>
@@ -148,12 +148,12 @@
             <p14:sldId id="262"/>
           </p14:sldIdLst>
         </p14:section>
-        <p14:section name="Demo 1 - Vibe" id="{82aa275a-f0a4-067f-9ab4-20ea476f4fa3}">
+        <p14:section name="Demo 1 - Vibe" id="{e6daab85-f23a-29cf-9a66-31b7ad79415e}">
           <p14:sldIdLst>
             <p14:sldId id="263"/>
           </p14:sldIdLst>
         </p14:section>
-        <p14:section name="Theory 2 - Planning" id="{65f4f2a0-c4f2-97f3-6f8d-af9873a95fc4}">
+        <p14:section name="Theory 2 - Planning" id="{cf2fd7a0-7217-55c7-faad-31654ffe7aed}">
           <p14:sldIdLst>
             <p14:sldId id="264"/>
             <p14:sldId id="265"/>
@@ -164,12 +164,12 @@
             <p14:sldId id="270"/>
           </p14:sldIdLst>
         </p14:section>
-        <p14:section name="Demo 2 - Disciplined" id="{a463ad12-8e17-cd94-200e-984cb5dc55df}">
+        <p14:section name="Demo 2 - Disciplined" id="{abad094d-ed67-59fb-e275-a545b5fa5cb9}">
           <p14:sldIdLst>
             <p14:sldId id="271"/>
           </p14:sldIdLst>
         </p14:section>
-        <p14:section name="Theory 3 - Context" id="{58dc10a8-ba1c-3780-0d58-ff674fa22fbb}">
+        <p14:section name="Theory 3 - Context" id="{c6623b92-6c22-f81c-20c8-9eef5ae539f3}">
           <p14:sldIdLst>
             <p14:sldId id="272"/>
             <p14:sldId id="273"/>
@@ -178,19 +178,19 @@
             <p14:sldId id="276"/>
           </p14:sldIdLst>
         </p14:section>
-        <p14:section name="Demo 3 - Cursor CLI" id="{f86819ae-4fce-1591-cc60-47beb95750eb}">
+        <p14:section name="Demo 3 - Cursor CLI" id="{508c662f-c384-020c-a470-bdcf7db4ed21}">
           <p14:sldIdLst>
             <p14:sldId id="277"/>
           </p14:sldIdLst>
         </p14:section>
-        <p14:section name="Close" id="{ae1e4c86-00d5-d213-8b11-6d8930b24520}">
+        <p14:section name="Close" id="{22fcbfcd-687a-99f1-372a-e21110279868}">
           <p14:sldIdLst>
             <p14:sldId id="278"/>
             <p14:sldId id="279"/>
             <p14:sldId id="280"/>
           </p14:sldIdLst>
         </p14:section>
-        <p14:section name="Backup" id="{8bdc4e65-370d-ce21-1625-6550ba1f2b01}">
+        <p14:section name="Backup" id="{58ab62d4-7f5e-e7ab-e919-0929bdf60eb1}">
           <p14:sldIdLst>
             <p14:sldId id="281"/>
             <p14:sldId id="282"/>
@@ -776,7 +776,7 @@
           <a:p>
             <a:r>
               <a:rPr lang="en-US" dirty="0"/>
-              <a:t>EUGENE. Walk the rows using the Demo 2 task. Point out the retail £600 row - without it, almost every agent caps everyone. And the constraint 'no promotions/' - because there's a constant called MAX_CAMPAIGN_PERCENT sitting there looking perfect.</a:t>
+              <a:t>EUGENE. Walk the rows using the Demo 2 task - the same ticket Demo 1 failed. Point at the acceptance row: 'over £100' became '&gt; 10000', so exactly £100 still paid; and nobody said express was excluded. Two facts we knew and never typed. And the context row says 'not src/shipping/' - because carrier-rates.ts and shipping-selector.ts are sitting there sounding perfect.</a:t>
             </a:r>
             <a:endParaRPr lang="en-US" dirty="0"/>
           </a:p>
@@ -1040,7 +1040,7 @@
           <a:p>
             <a:r>
               <a:rPr lang="en-US" dirty="0"/>
-              <a:t>EUGENE. The sections that matter most are the two people skip: 'don't touch' and 'open questions'. 'Don't touch' is what keeps the agent from wandering into promotions/ or refactoring the pipeline. 'Open questions' is where it tells you what it guessed - that's where the retail-vs-wholesale bug would have surfaced. Once approved, the plan is the contract: if the agent finds something that breaks the plan, the right move is to stop and re-plan, not let it improvise.</a:t>
+              <a:t>EUGENE. The sections that matter most are the two people skip: 'don't touch' and 'open questions'. 'Don't touch' is what keeps the agent from wandering into src/shipping/ or refactoring the pipeline. 'Open questions' is where it tells you what it guessed - 'does exactly £100 count? express too?' is where both of Demo 1's bugs would have surfaced. Once approved, the plan is the contract: if the agent finds something that breaks the plan, the right move is to stop and re-plan, not let it improvise.</a:t>
             </a:r>
             <a:endParaRPr lang="en-US" dirty="0"/>
           </a:p>
@@ -1216,7 +1216,7 @@
           <a:p>
             <a:r>
               <a:rPr lang="en-US" dirty="0"/>
-              <a:t>ADAM drives the Claude Code CLI in parcel-pilot-stage/demo2-disciplined, EUGENE narrates and keeps the same tally as Demo 1. Prompts: demo-kit/prompts.md (disciplined-1, disciplined-2, save-plan, build-from-plan). At step 3 ask the room 'what would you change in this plan?'. At step 4, read /context out loud before and after /clear - that drop is the point. Step 5 shows the build working from a clean window.</a:t>
+              <a:t>ADAM drives the Claude Code CLI (clean profile) in parcel-pilot-stage/demo2-disciplined, EUGENE narrates and keeps the same tally as Demo 1. Prompts: demo-kit/prompts.md (disciplined-1, disciplined-3, save-plan, build-from-plan). Step 2: 'same ticket Demo 1 got wrong - this time we say the two things we knew.' At step 3 ask the room 'what would you change in this plan?'. At step 4, read /context before and after /clear as numbers - a fresh session still holds the system prompt and CLAUDE.md, so the floor isn't zero. Step 5: run verify.mjs ... 1 3 - Task 3 passes here and failed in Demo 1.</a:t>
             </a:r>
             <a:endParaRPr lang="en-US" dirty="0"/>
           </a:p>
@@ -2800,7 +2800,7 @@
           <a:p>
             <a:r>
               <a:rPr lang="en-US" dirty="0"/>
-              <a:t>EUGENE drives, ADAM narrates and tallies. Eugene: fresh Claude Code session in parcel-pilot-stage/demo1-vibe, status line visible. Paste prompt 1. Narrate what it does - don't help it. ~4 min cap. Then prompt 2 in the SAME chat. At ~8 min run /context and leave it on screen. Adam: count files read, full test runs, wrong-file edits out loud. If it goes great, that's fine - the race will still show the averages, and say 'it got lucky with CLAUDE.md doing our job for us'.</a:t>
+              <a:t>EUGENE drives, ADAM narrates and tallies. Eugene: fresh Claude Code session (clean profile) in parcel-pilot-stage/demo1-vibe, status line visible. Paste prompt 1 - expect the tax fix to be right; say 'good docs and a failing test did our job for us'. Then prompt 2 in the SAME chat; ask the room if anyone sees a problem with the ticket. When it finishes, run the hidden check: node demo-kit/verify.mjs ../../parcel-pilot-stage/demo1-vibe 1 3. In rehearsal Task 3 failed every time: '&gt; 10000' means exactly £100 still pays, and express went free too. Open shipping-price.ts and show the one if. Then /context. Adam: 'It did exactly what we asked. The bug is in the prompt.'</a:t>
             </a:r>
             <a:endParaRPr lang="en-US" dirty="0"/>
           </a:p>
@@ -5381,7 +5381,7 @@
                   <a:schemeClr val="accent3"/>
                 </a:solidFill>
               </a:rPr>
-              <a:t>Six lines, not six paragraphs. Example: the wholesale discount cap we'll build in Demo 2.</a:t>
+              <a:t>Six lines, not six paragraphs. Example: the free-shipping ticket Demo 1 got wrong.</a:t>
             </a:r>
             <a:endParaRPr lang="en-US" sz="1500" dirty="0"/>
           </a:p>
@@ -5730,7 +5730,7 @@
                             <a:schemeClr val="tx1"/>
                           </a:solidFill>
                         </a:rPr>
-                        <a:t>Wholesale discounts are capped at £500</a:t>
+                        <a:t>Free standard shipping from £100, after discount</a:t>
                       </a:r>
                       <a:endParaRPr lang="en-US" sz="1500" dirty="0"/>
                     </a:p>
@@ -5906,7 +5906,7 @@
                             <a:schemeClr val="tx1"/>
                           </a:solidFill>
                         </a:rPr>
-                        <a:t>Retail £600 → £600; wholesale £600 → £500</a:t>
+                        <a:t>Exactly £100 → free; express → never free</a:t>
                       </a:r>
                       <a:endParaRPr lang="en-US" sz="1500" dirty="0"/>
                     </a:p>
@@ -6082,7 +6082,7 @@
                             <a:schemeClr val="tx1"/>
                           </a:solidFill>
                         </a:rPr>
-                        <a:t>apply-discount.ts, pricing-policy.ts, the test</a:t>
+                        <a:t>shipping-price.ts, pricing-policy.ts; not src/shipping/</a:t>
                       </a:r>
                       <a:endParaRPr lang="en-US" sz="1500" dirty="0"/>
                     </a:p>
@@ -6258,7 +6258,7 @@
                             <a:schemeClr val="tx1"/>
                           </a:solidFill>
                         </a:rPr>
-                        <a:t>No promotions/ edits, no floats, no new literals</a:t>
+                        <a:t>Method selection; no floats, no new literals</a:t>
                       </a:r>
                       <a:endParaRPr lang="en-US" sz="1500" dirty="0"/>
                     </a:p>
@@ -6610,7 +6610,7 @@
                             <a:schemeClr val="tx1"/>
                           </a:solidFill>
                         </a:rPr>
-                        <a:t>npm test -- tests/pricing/wholesale-discount.test.ts</a:t>
+                        <a:t>npm test -- tests/pricing &amp;&amp; npm run typecheck</a:t>
                       </a:r>
                       <a:endParaRPr lang="en-US" sz="1500" dirty="0"/>
                     </a:p>
@@ -6716,7 +6716,7 @@
                   <a:schemeClr val="tx2"/>
                 </a:solidFill>
               </a:rPr>
-              <a:t>The retail row is the one that matters: it's the edge case a vague prompt never mentions.</a:t>
+              <a:t>The acceptance row is the one that matters: both edge cases Demo 1 got wrong are in it.</a:t>
             </a:r>
             <a:endParaRPr lang="en-US" sz="1500" dirty="0"/>
           </a:p>
@@ -8216,7 +8216,7 @@
                   <a:schemeClr val="tx2"/>
                 </a:solidFill>
               </a:rPr>
-              <a:t>In Demo 1 the agent planned silently, inside its own head, where nobody could catch the retail cap before it was written.</a:t>
+              <a:t>In Demo 1 the agent planned silently, inside its own head, where nobody could ask "does exactly £100 count?" before it was written.</a:t>
             </a:r>
             <a:endParaRPr lang="en-US" sz="1500" dirty="0"/>
           </a:p>
@@ -8517,7 +8517,7 @@
                 <a:ea typeface="Consolas" pitchFamily="34" charset="-122"/>
                 <a:cs typeface="Consolas" pitchFamily="34" charset="-120"/>
               </a:rPr>
-              <a:t>Change       apply-discount.ts,</a:t>
+              <a:t>Change       shipping-price.ts,</a:t>
             </a:r>
             <a:endParaRPr lang="en-US" sz="1400" dirty="0"/>
           </a:p>
@@ -8551,7 +8551,7 @@
                 <a:ea typeface="Consolas" pitchFamily="34" charset="-122"/>
                 <a:cs typeface="Consolas" pitchFamily="34" charset="-120"/>
               </a:rPr>
-              <a:t>Don't touch  promotions/, api/, the pipeline</a:t>
+              <a:t>Don't touch  src/shipping/, price-breakdown</a:t>
             </a:r>
             <a:endParaRPr lang="en-US" sz="1400" dirty="0"/>
           </a:p>
@@ -8568,7 +8568,7 @@
                 <a:ea typeface="Consolas" pitchFamily="34" charset="-122"/>
                 <a:cs typeface="Consolas" pitchFamily="34" charset="-120"/>
               </a:rPr>
-              <a:t>Approach     cap in applyDiscount,</a:t>
+              <a:t>Approach     &gt;= threshold, after discount,</a:t>
             </a:r>
             <a:endParaRPr lang="en-US" sz="1400" dirty="0"/>
           </a:p>
@@ -8585,7 +8585,7 @@
                 <a:ea typeface="Consolas" pitchFamily="34" charset="-122"/>
                 <a:cs typeface="Consolas" pitchFamily="34" charset="-120"/>
               </a:rPr>
-              <a:t>             wholesale tier only</a:t>
+              <a:t>             standard method only</a:t>
             </a:r>
             <a:endParaRPr lang="en-US" sz="1400" dirty="0"/>
           </a:p>
@@ -8602,7 +8602,7 @@
                 <a:ea typeface="Consolas" pitchFamily="34" charset="-122"/>
                 <a:cs typeface="Consolas" pitchFamily="34" charset="-120"/>
               </a:rPr>
-              <a:t>Tests        below / at / above £500;</a:t>
+              <a:t>Tests        £99.99 / £100 / £150; express;</a:t>
             </a:r>
             <a:endParaRPr lang="en-US" sz="1400" dirty="0"/>
           </a:p>
@@ -8619,7 +8619,7 @@
                 <a:ea typeface="Consolas" pitchFamily="34" charset="-122"/>
                 <a:cs typeface="Consolas" pitchFamily="34" charset="-120"/>
               </a:rPr>
-              <a:t>             retail £600 stays £600</a:t>
+              <a:t>             £120 - 20% = £96 still pays</a:t>
             </a:r>
             <a:endParaRPr lang="en-US" sz="1400" dirty="0"/>
           </a:p>
@@ -8636,7 +8636,7 @@
                 <a:ea typeface="Consolas" pitchFamily="34" charset="-122"/>
                 <a:cs typeface="Consolas" pitchFamily="34" charset="-120"/>
               </a:rPr>
-              <a:t>Verify       npm test -- tests/pricing/…</a:t>
+              <a:t>Verify       npm test -- tests/pricing</a:t>
             </a:r>
             <a:endParaRPr lang="en-US" sz="1400" dirty="0"/>
           </a:p>
@@ -10507,7 +10507,7 @@
                   <a:schemeClr val="accent5"/>
                 </a:solidFill>
               </a:rPr>
-              <a:t>Claude Code CLI · the same bugs as Demo 1, done with a plan</a:t>
+              <a:t>Claude Code CLI · the same tickets as Demo 1, done with a plan</a:t>
             </a:r>
             <a:endParaRPr lang="en-US" sz="1600" dirty="0"/>
           </a:p>
@@ -10701,7 +10701,7 @@
                   <a:schemeClr val="bg1"/>
                 </a:solidFill>
               </a:rPr>
-              <a:t>/clear. Shift+Tab into plan mode. Six-part prompt for the wholesale cap.</a:t>
+              <a:t>/clear. Shift+Tab into plan mode. Six-part prompt for free shipping.</a:t>
             </a:r>
             <a:endParaRPr lang="en-US" sz="1600" dirty="0"/>
           </a:p>
@@ -10798,7 +10798,7 @@
                   <a:schemeClr val="bg1"/>
                 </a:solidFill>
               </a:rPr>
-              <a:t>Review the plan out loud: wholesale only? money, not percent? don't-touch list?</a:t>
+              <a:t>Review the plan out loud: at least £100? after discount? express excluded?</a:t>
             </a:r>
             <a:endParaRPr lang="en-US" sz="1600" dirty="0"/>
           </a:p>
@@ -10895,7 +10895,7 @@
                   <a:schemeClr val="bg1"/>
                 </a:solidFill>
               </a:rPr>
-              <a:t>Save it to plans/wholesale-cap.md. /context, then /clear.</a:t>
+              <a:t>Save it to plans/free-shipping.md. /context, then /clear.</a:t>
             </a:r>
             <a:endParaRPr lang="en-US" sz="1600" dirty="0"/>
           </a:p>
@@ -10992,7 +10992,7 @@
                   <a:schemeClr val="bg1"/>
                 </a:solidFill>
               </a:rPr>
-              <a:t>"Implement plans/wholesale-cap.md." Narrow test, verify, /context.</a:t>
+              <a:t>"Implement plans/free-shipping.md." Narrow test, hidden check, /context.</a:t>
             </a:r>
             <a:endParaRPr lang="en-US" sz="1600" dirty="0"/>
           </a:p>
@@ -11113,7 +11113,7 @@
                   <a:schemeClr val="bg1"/>
                 </a:solidFill>
               </a:rPr>
-              <a:t>Tiers in the plan, before any edit</a:t>
+              <a:t>Edge cases in the plan, before any edit</a:t>
             </a:r>
             <a:endParaRPr lang="en-US" sz="1600" dirty="0"/>
           </a:p>
@@ -11149,7 +11149,7 @@
                   <a:schemeClr val="bg1"/>
                 </a:solidFill>
               </a:rPr>
-              <a:t>Build reads the plan + 3 files</a:t>
+              <a:t>Build reads the plan + named files</a:t>
             </a:r>
             <a:endParaRPr lang="en-US" sz="1600" dirty="0"/>
           </a:p>
@@ -11185,7 +11185,7 @@
                   <a:schemeClr val="bg1"/>
                 </a:solidFill>
               </a:rPr>
-              <a:t>Retail £600 stays £600</a:t>
+              <a:t>Task 3: PASS here, FAIL in Demo 1</a:t>
             </a:r>
             <a:endParaRPr lang="en-US" sz="1600" dirty="0"/>
           </a:p>
@@ -14130,7 +14130,7 @@
                   <a:schemeClr val="tx1"/>
                 </a:solidFill>
               </a:rPr>
-              <a:t>2  Wholesale cap</a:t>
+              <a:t>3  Free shipping</a:t>
             </a:r>
             <a:endParaRPr lang="en-US" sz="1400" dirty="0"/>
           </a:p>
@@ -14479,7 +14479,7 @@
                   <a:schemeClr val="tx1"/>
                 </a:solidFill>
               </a:rPr>
-              <a:t>2  Wholesale cap</a:t>
+              <a:t>3  Free shipping</a:t>
             </a:r>
             <a:endParaRPr lang="en-US" sz="1400" dirty="0"/>
           </a:p>
@@ -16137,7 +16137,7 @@
                             <a:schemeClr val="tx1"/>
                           </a:solidFill>
                         </a:rPr>
-                        <a:t>Wholesale cap is £500</a:t>
+                        <a:t>Free shipping starts at £100</a:t>
                       </a:r>
                       <a:endParaRPr lang="en-US" sz="1500" dirty="0"/>
                     </a:p>
@@ -20139,7 +20139,7 @@
                   <a:schemeClr val="bg2"/>
                 </a:solidFill>
               </a:rPr>
-              <a:t>Homework: tasks 3, 5, 6 and 7 in workshop/tasks  ·  Questions?</a:t>
+              <a:t>Homework: tasks 2, 5, 6 and 7 in workshop/tasks  ·  Questions?</a:t>
             </a:r>
             <a:endParaRPr lang="en-US" sz="1600" dirty="0"/>
           </a:p>
@@ -25999,7 +25999,7 @@
                   <a:schemeClr val="accent3"/>
                 </a:solidFill>
               </a:rPr>
-              <a:t>promotion-engine.ts has a MAX_CAMPAIGN_PERCENT constant that is the wrong home for a money cap</a:t>
+              <a:t>src/shipping/ has carrier-rates.ts and shipping-selector.ts: right-sounding, wrong for what the customer pays</a:t>
             </a:r>
             <a:endParaRPr lang="en-US" sz="1500" dirty="0"/>
           </a:p>
@@ -28519,7 +28519,7 @@
                 <a:ea typeface="Consolas" pitchFamily="34" charset="-122"/>
                 <a:cs typeface="Consolas" pitchFamily="34" charset="-120"/>
               </a:rPr>
-              <a:t>Also, wholesale customers shouldn't get</a:t>
+              <a:t>Also, make shipping free on orders</a:t>
             </a:r>
             <a:endParaRPr lang="en-US" sz="1600" dirty="0"/>
           </a:p>
@@ -28536,7 +28536,7 @@
                 <a:ea typeface="Consolas" pitchFamily="34" charset="-122"/>
                 <a:cs typeface="Consolas" pitchFamily="34" charset="-120"/>
               </a:rPr>
-              <a:t>more than £500 off. Add that.</a:t>
+              <a:t>over £100.</a:t>
             </a:r>
             <a:endParaRPr lang="en-US" sz="1600" dirty="0"/>
           </a:p>
@@ -28675,7 +28675,7 @@
                   <a:schemeClr val="bg1"/>
                 </a:solidFill>
               </a:rPr>
-              <a:t>Edits to tax-calculator.ts (wrong file)</a:t>
+              <a:t>Full test-suite runs</a:t>
             </a:r>
             <a:endParaRPr lang="en-US" sz="1600" dirty="0"/>
           </a:p>
@@ -28693,7 +28693,7 @@
                   <a:schemeClr val="bg1"/>
                 </a:solidFill>
               </a:rPr>
-              <a:t>Full test-suite runs</a:t>
+              <a:t>Exactly £100: free, or still £5?</a:t>
             </a:r>
             <a:endParaRPr lang="en-US" sz="1600" dirty="0"/>
           </a:p>
@@ -28711,7 +28711,7 @@
                   <a:schemeClr val="bg1"/>
                 </a:solidFill>
               </a:rPr>
-              <a:t>A cap on retail too, or in promotions/</a:t>
+              <a:t>Express: did it go free too?</a:t>
             </a:r>
             <a:endParaRPr lang="en-US" sz="1600" dirty="0"/>
           </a:p>
@@ -28729,7 +28729,7 @@
                   <a:schemeClr val="bg1"/>
                 </a:solidFill>
               </a:rPr>
-              <a:t>Context % at the end</a:t>
+              <a:t>Hidden check, then context %</a:t>
             </a:r>
             <a:endParaRPr lang="en-US" sz="1600" dirty="0"/>
           </a:p>

--- a/presentation/vibe-vs-verified.pptx
+++ b/presentation/vibe-vs-verified.pptx
@@ -133,14 +133,14 @@
   <p:extLst>
     <p:ext uri="{521415D9-36F7-43E2-AB2F-B90AF26B5E84}">
       <p14:sectionLst xmlns:p14="http://schemas.microsoft.com/office/powerpoint/2010/main">
-        <p14:section name="Open" id="{c7f3685e-0c56-5faf-a489-838b025888e1}">
+        <p14:section name="Open" id="{8d21334a-dc7a-f962-1f8e-a844951e69f8}">
           <p14:sldIdLst>
             <p14:sldId id="256"/>
             <p14:sldId id="257"/>
             <p14:sldId id="258"/>
           </p14:sldIdLst>
         </p14:section>
-        <p14:section name="Theory 1 - Context" id="{a66c730b-b8db-2779-b6f9-275b1d268242}">
+        <p14:section name="Theory 1 - Context" id="{5b461ad3-e78c-8280-4b48-3daee8309e33}">
           <p14:sldIdLst>
             <p14:sldId id="259"/>
             <p14:sldId id="260"/>
@@ -148,12 +148,12 @@
             <p14:sldId id="262"/>
           </p14:sldIdLst>
         </p14:section>
-        <p14:section name="Demo 1 - Vibe" id="{e6daab85-f23a-29cf-9a66-31b7ad79415e}">
+        <p14:section name="Demo 1 - Vibe" id="{8a1147e1-2619-47b4-a0fb-a85eba30591d}">
           <p14:sldIdLst>
             <p14:sldId id="263"/>
           </p14:sldIdLst>
         </p14:section>
-        <p14:section name="Theory 2 - Planning" id="{cf2fd7a0-7217-55c7-faad-31654ffe7aed}">
+        <p14:section name="Theory 2 - Planning" id="{c5952fae-5029-514d-b3f1-74f3e7851f31}">
           <p14:sldIdLst>
             <p14:sldId id="264"/>
             <p14:sldId id="265"/>
@@ -164,12 +164,12 @@
             <p14:sldId id="270"/>
           </p14:sldIdLst>
         </p14:section>
-        <p14:section name="Demo 2 - Disciplined" id="{abad094d-ed67-59fb-e275-a545b5fa5cb9}">
+        <p14:section name="Demo 2 - Disciplined" id="{87060cc4-7ad5-72f1-bc8a-47f876e5a78a}">
           <p14:sldIdLst>
             <p14:sldId id="271"/>
           </p14:sldIdLst>
         </p14:section>
-        <p14:section name="Theory 3 - Context" id="{c6623b92-6c22-f81c-20c8-9eef5ae539f3}">
+        <p14:section name="Theory 3 - Context" id="{10a5dd2d-0eca-48fe-3350-1aa5efb62e17}">
           <p14:sldIdLst>
             <p14:sldId id="272"/>
             <p14:sldId id="273"/>
@@ -178,19 +178,19 @@
             <p14:sldId id="276"/>
           </p14:sldIdLst>
         </p14:section>
-        <p14:section name="Demo 3 - Cursor CLI" id="{508c662f-c384-020c-a470-bdcf7db4ed21}">
+        <p14:section name="Demo 3 - Cursor CLI" id="{01565d76-672e-a1ca-982d-5910d35f4631}">
           <p14:sldIdLst>
             <p14:sldId id="277"/>
           </p14:sldIdLst>
         </p14:section>
-        <p14:section name="Close" id="{22fcbfcd-687a-99f1-372a-e21110279868}">
+        <p14:section name="Close" id="{c1fc7d45-3690-638e-e8b6-23fe0df3148d}">
           <p14:sldIdLst>
             <p14:sldId id="278"/>
             <p14:sldId id="279"/>
             <p14:sldId id="280"/>
           </p14:sldIdLst>
         </p14:section>
-        <p14:section name="Backup" id="{58ab62d4-7f5e-e7ab-e919-0929bdf60eb1}">
+        <p14:section name="Backup" id="{3655b423-e01a-fdb2-e5ea-5c6632d58ead}">
           <p14:sldIdLst>
             <p14:sldId id="281"/>
             <p14:sldId id="282"/>
@@ -1216,7 +1216,7 @@
           <a:p>
             <a:r>
               <a:rPr lang="en-US" dirty="0"/>
-              <a:t>ADAM drives the Claude Code CLI (clean profile) in parcel-pilot-stage/demo2-disciplined, EUGENE narrates and keeps the same tally as Demo 1. Prompts: demo-kit/prompts.md (disciplined-1, disciplined-3, save-plan, build-from-plan). Step 2: 'same ticket Demo 1 got wrong - this time we say the two things we knew.' At step 3 ask the room 'what would you change in this plan?'. At step 4, read /context before and after /clear as numbers - a fresh session still holds the system prompt and CLAUDE.md, so the floor isn't zero. Step 5: run verify.mjs ... 1 3 - Task 3 passes here and failed in Demo 1.</a:t>
+              <a:t>ADAM drives the Claude Code CLI in parcel-pilot-stage/demo2-disciplined, EUGENE narrates and keeps the same tally as Demo 1. Prompts: demo-kit/prompts.md (disciplined-1, disciplined-3, save-plan, build-from-plan). Step 2: 'same ticket Demo 1 got wrong - this time we say the two things we knew.' At step 3 ask the room 'what would you change in this plan?'. At step 4, read /context before and after /clear as numbers - a fresh session still holds the system prompt and CLAUDE.md, so the floor isn't zero. Step 5: run verify.mjs ... 1 3 - Task 3 passes here and failed in Demo 1.</a:t>
             </a:r>
             <a:endParaRPr lang="en-US" dirty="0"/>
           </a:p>
@@ -1920,7 +1920,7 @@
           <a:p>
             <a:r>
               <a:rPr lang="en-US" dirty="0"/>
-              <a:t>BOTH. Eugene switches to the race terminal - the scoreboard prints when both lanes finish (results also saved in demo-kit/results/). Adam reads the rows top-down: correctness first, then tokens and context, then files. Fill the '_' cells in this slide from your rehearsal run so there's a fallback if the live race hasn't finished. If the vibe lane got everything right: point at tokens, peak context and files read - it paid more to get there.</a:t>
+              <a:t>BOTH. Eugene switches to the race terminal - the scoreboard prints when both lanes finish (results also saved in demo-kit/results/). Adam reads the rows top-down: correctness first, then tokens and context, then files. The numbers on this slide are from a rehearsal run - the fallback if the live race hasn't finished; say so if you use them. The failed vibe task is free shipping: 'over £100' became '&gt; 10000' and express went free too. Then cost and context: a third more spend for a worse result. Files read is a wash on this repo - good docs keep both lanes on the right files - so don't oversell it.</a:t>
             </a:r>
             <a:endParaRPr lang="en-US" dirty="0"/>
           </a:p>
@@ -2800,7 +2800,7 @@
           <a:p>
             <a:r>
               <a:rPr lang="en-US" dirty="0"/>
-              <a:t>EUGENE drives, ADAM narrates and tallies. Eugene: fresh Claude Code session (clean profile) in parcel-pilot-stage/demo1-vibe, status line visible. Paste prompt 1 - expect the tax fix to be right; say 'good docs and a failing test did our job for us'. Then prompt 2 in the SAME chat; ask the room if anyone sees a problem with the ticket. When it finishes, run the hidden check: node demo-kit/verify.mjs ../../parcel-pilot-stage/demo1-vibe 1 3. In rehearsal Task 3 failed every time: '&gt; 10000' means exactly £100 still pays, and express went free too. Open shipping-price.ts and show the one if. Then /context. Adam: 'It did exactly what we asked. The bug is in the prompt.'</a:t>
+              <a:t>EUGENE drives, ADAM narrates and tallies. Eugene: fresh Claude Code session in parcel-pilot-stage/demo1-vibe, status line visible. Paste prompt 1 - expect the tax fix to be right; say 'good docs and a failing test did our job for us'. Then prompt 2 in the SAME chat; ask the room if anyone sees a problem with the ticket. When it finishes, run the hidden check: node demo-kit/verify.mjs ../../parcel-pilot-stage/demo1-vibe 1 3. In rehearsal Task 3 failed every time: '&gt; 10000' means exactly £100 still pays, and express went free too. Open shipping-price.ts and show the one if. Then /context. Adam: 'It did exactly what we asked. The bug is in the prompt.'</a:t>
             </a:r>
             <a:endParaRPr lang="en-US" dirty="0"/>
           </a:p>
@@ -17888,7 +17888,7 @@
                             <a:schemeClr val="tx1"/>
                           </a:solidFill>
                         </a:rPr>
-                        <a:t>_ / 3</a:t>
+                        <a:t>2 / 3</a:t>
                       </a:r>
                       <a:endParaRPr lang="en-US" sz="1500" dirty="0"/>
                     </a:p>
@@ -17946,7 +17946,7 @@
                             <a:schemeClr val="tx1"/>
                           </a:solidFill>
                         </a:rPr>
-                        <a:t>_ / 3</a:t>
+                        <a:t>3 / 3</a:t>
                       </a:r>
                       <a:endParaRPr lang="en-US" sz="1500" dirty="0"/>
                     </a:p>
@@ -18064,7 +18064,7 @@
                             <a:schemeClr val="tx1"/>
                           </a:solidFill>
                         </a:rPr>
-                        <a:t>_</a:t>
+                        <a:t>907k</a:t>
                       </a:r>
                       <a:endParaRPr lang="en-US" sz="1500" dirty="0"/>
                     </a:p>
@@ -18122,7 +18122,7 @@
                             <a:schemeClr val="tx1"/>
                           </a:solidFill>
                         </a:rPr>
-                        <a:t>_</a:t>
+                        <a:t>729k</a:t>
                       </a:r>
                       <a:endParaRPr lang="en-US" sz="1500" dirty="0"/>
                     </a:p>
@@ -18240,7 +18240,7 @@
                             <a:schemeClr val="tx1"/>
                           </a:solidFill>
                         </a:rPr>
-                        <a:t>_</a:t>
+                        <a:t>60.0k</a:t>
                       </a:r>
                       <a:endParaRPr lang="en-US" sz="1500" dirty="0"/>
                     </a:p>
@@ -18298,7 +18298,7 @@
                             <a:schemeClr val="tx1"/>
                           </a:solidFill>
                         </a:rPr>
-                        <a:t>_</a:t>
+                        <a:t>51.3k</a:t>
                       </a:r>
                       <a:endParaRPr lang="en-US" sz="1500" dirty="0"/>
                     </a:p>
@@ -18416,7 +18416,7 @@
                             <a:schemeClr val="tx1"/>
                           </a:solidFill>
                         </a:rPr>
-                        <a:t>_</a:t>
+                        <a:t>$0.90</a:t>
                       </a:r>
                       <a:endParaRPr lang="en-US" sz="1500" dirty="0"/>
                     </a:p>
@@ -18474,7 +18474,183 @@
                             <a:schemeClr val="tx1"/>
                           </a:solidFill>
                         </a:rPr>
-                        <a:t>_</a:t>
+                        <a:t>$0.60</a:t>
+                      </a:r>
+                      <a:endParaRPr lang="en-US" sz="1500" dirty="0"/>
+                    </a:p>
+                  </a:txBody>
+                  <a:tcPr marL="128016" marR="128016" marT="36576" marB="36576" anchor="ctr">
+                    <a:lnL w="12700" cap="flat" cmpd="sng" algn="ctr">
+                      <a:solidFill>
+                        <a:srgbClr val="EAF0F4"/>
+                      </a:solidFill>
+                      <a:prstDash val="solid"/>
+                      <a:round/>
+                      <a:headEnd type="none" w="med" len="med"/>
+                      <a:tailEnd type="none" w="med" len="med"/>
+                    </a:lnL>
+                    <a:lnR w="12700" cap="flat" cmpd="sng" algn="ctr">
+                      <a:solidFill>
+                        <a:srgbClr val="EAF0F4"/>
+                      </a:solidFill>
+                      <a:prstDash val="solid"/>
+                      <a:round/>
+                      <a:headEnd type="none" w="med" len="med"/>
+                      <a:tailEnd type="none" w="med" len="med"/>
+                    </a:lnR>
+                    <a:lnT w="12700" cap="flat" cmpd="sng" algn="ctr">
+                      <a:solidFill>
+                        <a:srgbClr val="EAF0F4"/>
+                      </a:solidFill>
+                      <a:prstDash val="solid"/>
+                      <a:round/>
+                      <a:headEnd type="none" w="med" len="med"/>
+                      <a:tailEnd type="none" w="med" len="med"/>
+                    </a:lnT>
+                    <a:lnB w="12700" cap="flat" cmpd="sng" algn="ctr">
+                      <a:solidFill>
+                        <a:srgbClr val="EAF0F4"/>
+                      </a:solidFill>
+                      <a:prstDash val="solid"/>
+                      <a:round/>
+                      <a:headEnd type="none" w="med" len="med"/>
+                      <a:tailEnd type="none" w="med" len="med"/>
+                    </a:lnB>
+                  </a:tcPr>
+                </a:tc>
+              </a:tr>
+              <a:tr h="512064">
+                <a:tc>
+                  <a:txBody>
+                    <a:bodyPr/>
+                    <a:lstStyle/>
+                    <a:p>
+                      <a:pPr indent="0" marL="0">
+                        <a:buNone/>
+                      </a:pPr>
+                      <a:r>
+                        <a:rPr lang="en-US" sz="1500" b="1" dirty="0">
+                          <a:solidFill>
+                            <a:schemeClr val="tx1"/>
+                          </a:solidFill>
+                        </a:rPr>
+                        <a:t>Full / focused test runs</a:t>
+                      </a:r>
+                      <a:endParaRPr lang="en-US" sz="1500" dirty="0"/>
+                    </a:p>
+                  </a:txBody>
+                  <a:tcPr marL="128016" marR="128016" marT="36576" marB="36576" anchor="ctr">
+                    <a:lnL w="12700" cap="flat" cmpd="sng" algn="ctr">
+                      <a:solidFill>
+                        <a:srgbClr val="EAF0F4"/>
+                      </a:solidFill>
+                      <a:prstDash val="solid"/>
+                      <a:round/>
+                      <a:headEnd type="none" w="med" len="med"/>
+                      <a:tailEnd type="none" w="med" len="med"/>
+                    </a:lnL>
+                    <a:lnR w="12700" cap="flat" cmpd="sng" algn="ctr">
+                      <a:solidFill>
+                        <a:srgbClr val="EAF0F4"/>
+                      </a:solidFill>
+                      <a:prstDash val="solid"/>
+                      <a:round/>
+                      <a:headEnd type="none" w="med" len="med"/>
+                      <a:tailEnd type="none" w="med" len="med"/>
+                    </a:lnR>
+                    <a:lnT w="12700" cap="flat" cmpd="sng" algn="ctr">
+                      <a:solidFill>
+                        <a:srgbClr val="EAF0F4"/>
+                      </a:solidFill>
+                      <a:prstDash val="solid"/>
+                      <a:round/>
+                      <a:headEnd type="none" w="med" len="med"/>
+                      <a:tailEnd type="none" w="med" len="med"/>
+                    </a:lnT>
+                    <a:lnB w="12700" cap="flat" cmpd="sng" algn="ctr">
+                      <a:solidFill>
+                        <a:srgbClr val="EAF0F4"/>
+                      </a:solidFill>
+                      <a:prstDash val="solid"/>
+                      <a:round/>
+                      <a:headEnd type="none" w="med" len="med"/>
+                      <a:tailEnd type="none" w="med" len="med"/>
+                    </a:lnB>
+                  </a:tcPr>
+                </a:tc>
+                <a:tc>
+                  <a:txBody>
+                    <a:bodyPr/>
+                    <a:lstStyle/>
+                    <a:p>
+                      <a:pPr algn="ctr" indent="0" marL="0">
+                        <a:buNone/>
+                      </a:pPr>
+                      <a:r>
+                        <a:rPr lang="en-US" sz="1500" dirty="0">
+                          <a:solidFill>
+                            <a:schemeClr val="tx1"/>
+                          </a:solidFill>
+                        </a:rPr>
+                        <a:t>5 / 0</a:t>
+                      </a:r>
+                      <a:endParaRPr lang="en-US" sz="1500" dirty="0"/>
+                    </a:p>
+                  </a:txBody>
+                  <a:tcPr marL="128016" marR="128016" marT="36576" marB="36576" anchor="ctr">
+                    <a:lnL w="12700" cap="flat" cmpd="sng" algn="ctr">
+                      <a:solidFill>
+                        <a:srgbClr val="EAF0F4"/>
+                      </a:solidFill>
+                      <a:prstDash val="solid"/>
+                      <a:round/>
+                      <a:headEnd type="none" w="med" len="med"/>
+                      <a:tailEnd type="none" w="med" len="med"/>
+                    </a:lnL>
+                    <a:lnR w="12700" cap="flat" cmpd="sng" algn="ctr">
+                      <a:solidFill>
+                        <a:srgbClr val="EAF0F4"/>
+                      </a:solidFill>
+                      <a:prstDash val="solid"/>
+                      <a:round/>
+                      <a:headEnd type="none" w="med" len="med"/>
+                      <a:tailEnd type="none" w="med" len="med"/>
+                    </a:lnR>
+                    <a:lnT w="12700" cap="flat" cmpd="sng" algn="ctr">
+                      <a:solidFill>
+                        <a:srgbClr val="EAF0F4"/>
+                      </a:solidFill>
+                      <a:prstDash val="solid"/>
+                      <a:round/>
+                      <a:headEnd type="none" w="med" len="med"/>
+                      <a:tailEnd type="none" w="med" len="med"/>
+                    </a:lnT>
+                    <a:lnB w="12700" cap="flat" cmpd="sng" algn="ctr">
+                      <a:solidFill>
+                        <a:srgbClr val="EAF0F4"/>
+                      </a:solidFill>
+                      <a:prstDash val="solid"/>
+                      <a:round/>
+                      <a:headEnd type="none" w="med" len="med"/>
+                      <a:tailEnd type="none" w="med" len="med"/>
+                    </a:lnB>
+                  </a:tcPr>
+                </a:tc>
+                <a:tc>
+                  <a:txBody>
+                    <a:bodyPr/>
+                    <a:lstStyle/>
+                    <a:p>
+                      <a:pPr algn="ctr" indent="0" marL="0">
+                        <a:buNone/>
+                      </a:pPr>
+                      <a:r>
+                        <a:rPr lang="en-US" sz="1500" dirty="0">
+                          <a:solidFill>
+                            <a:schemeClr val="tx1"/>
+                          </a:solidFill>
+                        </a:rPr>
+                        <a:t>0 / 3</a:t>
                       </a:r>
                       <a:endParaRPr lang="en-US" sz="1500" dirty="0"/>
                     </a:p>
@@ -18592,7 +18768,7 @@
                             <a:schemeClr val="tx1"/>
                           </a:solidFill>
                         </a:rPr>
-                        <a:t>_</a:t>
+                        <a:t>7 · 100%</a:t>
                       </a:r>
                       <a:endParaRPr lang="en-US" sz="1500" dirty="0"/>
                     </a:p>
@@ -18650,183 +18826,7 @@
                             <a:schemeClr val="tx1"/>
                           </a:solidFill>
                         </a:rPr>
-                        <a:t>_</a:t>
-                      </a:r>
-                      <a:endParaRPr lang="en-US" sz="1500" dirty="0"/>
-                    </a:p>
-                  </a:txBody>
-                  <a:tcPr marL="128016" marR="128016" marT="36576" marB="36576" anchor="ctr">
-                    <a:lnL w="12700" cap="flat" cmpd="sng" algn="ctr">
-                      <a:solidFill>
-                        <a:srgbClr val="EAF0F4"/>
-                      </a:solidFill>
-                      <a:prstDash val="solid"/>
-                      <a:round/>
-                      <a:headEnd type="none" w="med" len="med"/>
-                      <a:tailEnd type="none" w="med" len="med"/>
-                    </a:lnL>
-                    <a:lnR w="12700" cap="flat" cmpd="sng" algn="ctr">
-                      <a:solidFill>
-                        <a:srgbClr val="EAF0F4"/>
-                      </a:solidFill>
-                      <a:prstDash val="solid"/>
-                      <a:round/>
-                      <a:headEnd type="none" w="med" len="med"/>
-                      <a:tailEnd type="none" w="med" len="med"/>
-                    </a:lnR>
-                    <a:lnT w="12700" cap="flat" cmpd="sng" algn="ctr">
-                      <a:solidFill>
-                        <a:srgbClr val="EAF0F4"/>
-                      </a:solidFill>
-                      <a:prstDash val="solid"/>
-                      <a:round/>
-                      <a:headEnd type="none" w="med" len="med"/>
-                      <a:tailEnd type="none" w="med" len="med"/>
-                    </a:lnT>
-                    <a:lnB w="12700" cap="flat" cmpd="sng" algn="ctr">
-                      <a:solidFill>
-                        <a:srgbClr val="EAF0F4"/>
-                      </a:solidFill>
-                      <a:prstDash val="solid"/>
-                      <a:round/>
-                      <a:headEnd type="none" w="med" len="med"/>
-                      <a:tailEnd type="none" w="med" len="med"/>
-                    </a:lnB>
-                  </a:tcPr>
-                </a:tc>
-              </a:tr>
-              <a:tr h="512064">
-                <a:tc>
-                  <a:txBody>
-                    <a:bodyPr/>
-                    <a:lstStyle/>
-                    <a:p>
-                      <a:pPr indent="0" marL="0">
-                        <a:buNone/>
-                      </a:pPr>
-                      <a:r>
-                        <a:rPr lang="en-US" sz="1500" b="1" dirty="0">
-                          <a:solidFill>
-                            <a:schemeClr val="tx1"/>
-                          </a:solidFill>
-                        </a:rPr>
-                        <a:t>Files changed that didn't need to</a:t>
-                      </a:r>
-                      <a:endParaRPr lang="en-US" sz="1500" dirty="0"/>
-                    </a:p>
-                  </a:txBody>
-                  <a:tcPr marL="128016" marR="128016" marT="36576" marB="36576" anchor="ctr">
-                    <a:lnL w="12700" cap="flat" cmpd="sng" algn="ctr">
-                      <a:solidFill>
-                        <a:srgbClr val="EAF0F4"/>
-                      </a:solidFill>
-                      <a:prstDash val="solid"/>
-                      <a:round/>
-                      <a:headEnd type="none" w="med" len="med"/>
-                      <a:tailEnd type="none" w="med" len="med"/>
-                    </a:lnL>
-                    <a:lnR w="12700" cap="flat" cmpd="sng" algn="ctr">
-                      <a:solidFill>
-                        <a:srgbClr val="EAF0F4"/>
-                      </a:solidFill>
-                      <a:prstDash val="solid"/>
-                      <a:round/>
-                      <a:headEnd type="none" w="med" len="med"/>
-                      <a:tailEnd type="none" w="med" len="med"/>
-                    </a:lnR>
-                    <a:lnT w="12700" cap="flat" cmpd="sng" algn="ctr">
-                      <a:solidFill>
-                        <a:srgbClr val="EAF0F4"/>
-                      </a:solidFill>
-                      <a:prstDash val="solid"/>
-                      <a:round/>
-                      <a:headEnd type="none" w="med" len="med"/>
-                      <a:tailEnd type="none" w="med" len="med"/>
-                    </a:lnT>
-                    <a:lnB w="12700" cap="flat" cmpd="sng" algn="ctr">
-                      <a:solidFill>
-                        <a:srgbClr val="EAF0F4"/>
-                      </a:solidFill>
-                      <a:prstDash val="solid"/>
-                      <a:round/>
-                      <a:headEnd type="none" w="med" len="med"/>
-                      <a:tailEnd type="none" w="med" len="med"/>
-                    </a:lnB>
-                  </a:tcPr>
-                </a:tc>
-                <a:tc>
-                  <a:txBody>
-                    <a:bodyPr/>
-                    <a:lstStyle/>
-                    <a:p>
-                      <a:pPr algn="ctr" indent="0" marL="0">
-                        <a:buNone/>
-                      </a:pPr>
-                      <a:r>
-                        <a:rPr lang="en-US" sz="1500" dirty="0">
-                          <a:solidFill>
-                            <a:schemeClr val="tx1"/>
-                          </a:solidFill>
-                        </a:rPr>
-                        <a:t>_</a:t>
-                      </a:r>
-                      <a:endParaRPr lang="en-US" sz="1500" dirty="0"/>
-                    </a:p>
-                  </a:txBody>
-                  <a:tcPr marL="128016" marR="128016" marT="36576" marB="36576" anchor="ctr">
-                    <a:lnL w="12700" cap="flat" cmpd="sng" algn="ctr">
-                      <a:solidFill>
-                        <a:srgbClr val="EAF0F4"/>
-                      </a:solidFill>
-                      <a:prstDash val="solid"/>
-                      <a:round/>
-                      <a:headEnd type="none" w="med" len="med"/>
-                      <a:tailEnd type="none" w="med" len="med"/>
-                    </a:lnL>
-                    <a:lnR w="12700" cap="flat" cmpd="sng" algn="ctr">
-                      <a:solidFill>
-                        <a:srgbClr val="EAF0F4"/>
-                      </a:solidFill>
-                      <a:prstDash val="solid"/>
-                      <a:round/>
-                      <a:headEnd type="none" w="med" len="med"/>
-                      <a:tailEnd type="none" w="med" len="med"/>
-                    </a:lnR>
-                    <a:lnT w="12700" cap="flat" cmpd="sng" algn="ctr">
-                      <a:solidFill>
-                        <a:srgbClr val="EAF0F4"/>
-                      </a:solidFill>
-                      <a:prstDash val="solid"/>
-                      <a:round/>
-                      <a:headEnd type="none" w="med" len="med"/>
-                      <a:tailEnd type="none" w="med" len="med"/>
-                    </a:lnT>
-                    <a:lnB w="12700" cap="flat" cmpd="sng" algn="ctr">
-                      <a:solidFill>
-                        <a:srgbClr val="EAF0F4"/>
-                      </a:solidFill>
-                      <a:prstDash val="solid"/>
-                      <a:round/>
-                      <a:headEnd type="none" w="med" len="med"/>
-                      <a:tailEnd type="none" w="med" len="med"/>
-                    </a:lnB>
-                  </a:tcPr>
-                </a:tc>
-                <a:tc>
-                  <a:txBody>
-                    <a:bodyPr/>
-                    <a:lstStyle/>
-                    <a:p>
-                      <a:pPr algn="ctr" indent="0" marL="0">
-                        <a:buNone/>
-                      </a:pPr>
-                      <a:r>
-                        <a:rPr lang="en-US" sz="1500" dirty="0">
-                          <a:solidFill>
-                            <a:schemeClr val="tx1"/>
-                          </a:solidFill>
-                        </a:rPr>
-                        <a:t>_</a:t>
+                        <a:t>9 · 89%</a:t>
                       </a:r>
                       <a:endParaRPr lang="en-US" sz="1500" dirty="0"/>
                     </a:p>
@@ -18944,7 +18944,7 @@
                             <a:schemeClr val="tx1"/>
                           </a:solidFill>
                         </a:rPr>
-                        <a:t>_</a:t>
+                        <a:t>2.2</a:t>
                       </a:r>
                       <a:endParaRPr lang="en-US" sz="1500" dirty="0"/>
                     </a:p>
@@ -19002,7 +19002,7 @@
                             <a:schemeClr val="tx1"/>
                           </a:solidFill>
                         </a:rPr>
-                        <a:t>_</a:t>
+                        <a:t>1.7</a:t>
                       </a:r>
                       <a:endParaRPr lang="en-US" sz="1500" dirty="0"/>
                     </a:p>

--- a/presentation/vibe-vs-verified.pptx
+++ b/presentation/vibe-vs-verified.pptx
@@ -133,14 +133,14 @@
   <p:extLst>
     <p:ext uri="{521415D9-36F7-43E2-AB2F-B90AF26B5E84}">
       <p14:sectionLst xmlns:p14="http://schemas.microsoft.com/office/powerpoint/2010/main">
-        <p14:section name="Open" id="{8d21334a-dc7a-f962-1f8e-a844951e69f8}">
+        <p14:section name="Open" id="{0c86d74f-007e-1810-adbc-ea543e438bde}">
           <p14:sldIdLst>
             <p14:sldId id="256"/>
             <p14:sldId id="257"/>
             <p14:sldId id="258"/>
           </p14:sldIdLst>
         </p14:section>
-        <p14:section name="Theory 1 - Context" id="{5b461ad3-e78c-8280-4b48-3daee8309e33}">
+        <p14:section name="Theory 1 - Context" id="{4bd7b357-e757-452b-b498-26d0fd66136f}">
           <p14:sldIdLst>
             <p14:sldId id="259"/>
             <p14:sldId id="260"/>
@@ -148,12 +148,12 @@
             <p14:sldId id="262"/>
           </p14:sldIdLst>
         </p14:section>
-        <p14:section name="Demo 1 - Vibe" id="{8a1147e1-2619-47b4-a0fb-a85eba30591d}">
+        <p14:section name="Demo 1 - Vibe" id="{7b5e6853-eebf-bb63-b00d-d782a7e818dd}">
           <p14:sldIdLst>
             <p14:sldId id="263"/>
           </p14:sldIdLst>
         </p14:section>
-        <p14:section name="Theory 2 - Planning" id="{c5952fae-5029-514d-b3f1-74f3e7851f31}">
+        <p14:section name="Theory 2 - Planning" id="{ab9f51fa-e18e-c10d-e865-cb9bd5c218d5}">
           <p14:sldIdLst>
             <p14:sldId id="264"/>
             <p14:sldId id="265"/>
@@ -164,12 +164,12 @@
             <p14:sldId id="270"/>
           </p14:sldIdLst>
         </p14:section>
-        <p14:section name="Demo 2 - Disciplined" id="{87060cc4-7ad5-72f1-bc8a-47f876e5a78a}">
+        <p14:section name="Demo 2 - Disciplined" id="{a63d7c43-6bf3-5f07-1378-b5e63b6b6a15}">
           <p14:sldIdLst>
             <p14:sldId id="271"/>
           </p14:sldIdLst>
         </p14:section>
-        <p14:section name="Theory 3 - Context" id="{10a5dd2d-0eca-48fe-3350-1aa5efb62e17}">
+        <p14:section name="Theory 3 - Context" id="{8773123d-37db-fe5a-2d6f-865f35254f87}">
           <p14:sldIdLst>
             <p14:sldId id="272"/>
             <p14:sldId id="273"/>
@@ -178,19 +178,19 @@
             <p14:sldId id="276"/>
           </p14:sldIdLst>
         </p14:section>
-        <p14:section name="Demo 3 - Cursor CLI" id="{01565d76-672e-a1ca-982d-5910d35f4631}">
+        <p14:section name="Demo 3 - Fresh context" id="{ae5843b7-c474-07a9-59c2-559d2150c4e5}">
           <p14:sldIdLst>
             <p14:sldId id="277"/>
           </p14:sldIdLst>
         </p14:section>
-        <p14:section name="Close" id="{c1fc7d45-3690-638e-e8b6-23fe0df3148d}">
+        <p14:section name="Close" id="{fc53ddf9-1d88-7cb5-509f-45d21a63f8f9}">
           <p14:sldIdLst>
             <p14:sldId id="278"/>
             <p14:sldId id="279"/>
             <p14:sldId id="280"/>
           </p14:sldIdLst>
         </p14:section>
-        <p14:section name="Backup" id="{3655b423-e01a-fdb2-e5ea-5c6632d58ead}">
+        <p14:section name="Backup" id="{cf46c551-a743-51a0-74d5-10434a08dc4f}">
           <p14:sldIdLst>
             <p14:sldId id="281"/>
             <p14:sldId id="282"/>
@@ -600,7 +600,7 @@
           <a:p>
             <a:r>
               <a:rPr lang="en-US" dirty="0"/>
-              <a:t>ADAM. Welcome. 60 minutes, no laptops needed - we drive, you watch and heckle. We alternate theory and live demos four times so nobody sits through 30 minutes of slides. Promise: everything we show is in the terminal - the Claude Code CLI and the Cursor CLI - and works the same in both, and there is a one-page cheat sheet at the end.</a:t>
+              <a:t>ADAM. Welcome. 60 minutes, no laptops needed - we drive, you watch and heckle. We alternate theory and live demos four times so nobody sits through 30 minutes of slides. Promise: every demo is live in the Claude Code CLI, and every habit works the same in Cursor - the Cursor equivalents are on the cheat sheet you get at the end.</a:t>
             </a:r>
             <a:endParaRPr lang="en-US" dirty="0"/>
           </a:p>
@@ -1744,7 +1744,7 @@
           <a:p>
             <a:r>
               <a:rPr lang="en-US" dirty="0"/>
-              <a:t>ADAM. The instinct after a bad session is 'add it to CLAUDE.md'. Do that for a year and every prompt carries thousands of tokens of folklore. Use the layers. Eugene's going to show the whole thing in the Cursor CLI: a new goal, a fresh context, and a lesson saved as a scoped rule.</a:t>
+              <a:t>ADAM. The instinct after a bad session is 'add it to CLAUDE.md'. Do that for a year and every prompt carries thousands of tokens of folklore. Use the layers. Eugene's going to show the whole thing: a new goal, a fresh context, and a lesson saved as a scoped rule.</a:t>
             </a:r>
             <a:endParaRPr lang="en-US" dirty="0"/>
           </a:p>
@@ -1832,7 +1832,7 @@
           <a:p>
             <a:r>
               <a:rPr lang="en-US" dirty="0"/>
-              <a:t>EUGENE drives the Cursor CLI (`agent`) in parcel-pilot-stage/demo3-cursor, ADAM narrates. Step 1: cat AGENTS.md so the room sees layer 0 is tiny. Step 2: point out the agent reads ADR 003 because the prompt pointed at it - progressive disclosure on demand, not preloaded. The decoys: delivery-queue.ts (when to retry) and notification-log.ts (audit). The trap: the constant is named maxRetries but holds the attempt count - changing it to 2 gives ONE retry. Step 5: create .cursor/rules/notifications.mdc (copy from demo-kit/cursor-rule-example if short on time) - it loads only when the agent touches src/notifications/**. Then: 'Adam, how's the race?'</a:t>
+              <a:t>EUGENE drives the Claude Code CLI in parcel-pilot-stage/demo3-notifications, ADAM narrates. Step 1: cat CLAUDE.md so the room sees layer 0 is short and says nothing about notifications. Step 2: point out the agent reads ADR 003 because the prompt pointed at it - progressive disclosure on demand, not preloaded. The decoys: delivery-queue.ts (when to retry) and notification-log.ts (audit). The trap: the constant is named maxRetries but holds the attempt count - changing it to 2 gives ONE retry. Step 5: create .claude/rules/notifications.md (copy from demo-kit/claude-rule-example if short on time). The paths: frontmatter means Claude loads it only when it reads or edits a matching file. Cursor users: same idea as .cursor/rules/*.mdc with globs. Then: 'Adam, how's the race?'</a:t>
             </a:r>
             <a:endParaRPr lang="en-US" dirty="0"/>
           </a:p>
@@ -2184,7 +2184,7 @@
           <a:p>
             <a:r>
               <a:rPr lang="en-US" dirty="0"/>
-              <a:t>EUGENE. This table is on the cheat sheet, so don't photograph it. Point out: both tools have plan mode, both have mentions, both have compaction and a reset. Adam uses the Claude Code CLI for the next demo; I'll do the last one in the Cursor CLI (agent). Over to Adam.</a:t>
+              <a:t>EUGENE. This table is on the cheat sheet, so don't photograph it. Point out: both tools have plan mode, both have mentions, both have compaction and a reset. We demo in Claude Code; if you use Cursor, every move we made has a column here.</a:t>
             </a:r>
             <a:endParaRPr lang="en-US" dirty="0"/>
           </a:p>
@@ -4017,7 +4017,7 @@
                   <a:schemeClr val="bg2"/>
                 </a:solidFill>
               </a:rPr>
-              <a:t>Token-efficient AI development with the Cursor and Claude Code CLIs</a:t>
+              <a:t>Token-efficient AI development with Claude Code (and Cursor)</a:t>
             </a:r>
             <a:endParaRPr lang="en-US" sz="2400" dirty="0"/>
           </a:p>
@@ -13428,7 +13428,7 @@
                   <a:schemeClr val="bg1"/>
                 </a:solidFill>
               </a:rPr>
-              <a:t>.cursor/rules with globs · nested CLAUDE.md</a:t>
+              <a:t>.claude/rules + paths · nested CLAUDE.md · .cursor/rules</a:t>
             </a:r>
             <a:endParaRPr lang="en-US" sz="1300" dirty="0"/>
           </a:p>
@@ -16692,7 +16692,7 @@
                   <a:schemeClr val="accent5"/>
                 </a:solidFill>
               </a:rPr>
-              <a:t>Cursor CLI (agent) · the subject changes from pricing to notifications</a:t>
+              <a:t>Claude Code CLI · the subject changes from pricing to notifications</a:t>
             </a:r>
             <a:endParaRPr lang="en-US" sz="1600" dirty="0"/>
           </a:p>
@@ -16789,7 +16789,7 @@
                   <a:schemeClr val="bg1"/>
                 </a:solidFill>
               </a:rPr>
-              <a:t>New goal, so /clear. Show AGENTS.md: a few lines, mostly pointers.</a:t>
+              <a:t>New goal, so /clear. Show CLAUDE.md: short, and nothing about notifications.</a:t>
             </a:r>
             <a:endParaRPr lang="en-US" sz="1600" dirty="0"/>
           </a:p>
@@ -16886,7 +16886,7 @@
                   <a:schemeClr val="bg1"/>
                 </a:solidFill>
               </a:rPr>
-              <a:t>Shift+Tab to Plan. @ the retry policy and its test; the prompt points at ADR 003.</a:t>
+              <a:t>Shift+Tab into plan mode. @ the retry policy and its test; the prompt points at ADR 003.</a:t>
             </a:r>
             <a:endParaRPr lang="en-US" sz="1600" dirty="0"/>
           </a:p>
@@ -17080,7 +17080,7 @@
                   <a:schemeClr val="bg1"/>
                 </a:solidFill>
               </a:rPr>
-              <a:t>Build. Narrow test, typecheck, hidden verification. /summarize if it got long.</a:t>
+              <a:t>Build. Narrow test, typecheck, hidden verification. /compact if it got long.</a:t>
             </a:r>
             <a:endParaRPr lang="en-US" sz="1600" dirty="0"/>
           </a:p>
@@ -17177,7 +17177,7 @@
                   <a:schemeClr val="bg1"/>
                 </a:solidFill>
               </a:rPr>
-              <a:t>Save the lesson at layer 2: a scoped rule, not AGENTS.md.</a:t>
+              <a:t>Save the lesson at layer 2: a path-scoped rule, not CLAUDE.md.</a:t>
             </a:r>
             <a:endParaRPr lang="en-US" sz="1600" dirty="0"/>
           </a:p>
@@ -17235,12 +17235,12 @@
               <a:buNone/>
             </a:pPr>
             <a:r>
-              <a:rPr lang="en-US" sz="1200" b="1" spc="100" kern="0" dirty="0">
+              <a:rPr lang="en-US" sz="1200" b="1" dirty="0">
                 <a:solidFill>
                   <a:schemeClr val="accent4"/>
                 </a:solidFill>
               </a:rPr>
-              <a:t>THE SCOPED RULE</a:t>
+              <a:t>.claude/rules/notifications.md</a:t>
             </a:r>
             <a:endParaRPr lang="en-US" sz="1200" dirty="0"/>
           </a:p>
@@ -17296,7 +17296,7 @@
                 <a:ea typeface="Consolas" pitchFamily="34" charset="-122"/>
                 <a:cs typeface="Consolas" pitchFamily="34" charset="-120"/>
               </a:rPr>
-              <a:t>description: Notification retry</a:t>
+              <a:t>paths:</a:t>
             </a:r>
             <a:endParaRPr lang="en-US" sz="1400" dirty="0"/>
           </a:p>
@@ -17313,7 +17313,7 @@
                 <a:ea typeface="Consolas" pitchFamily="34" charset="-122"/>
                 <a:cs typeface="Consolas" pitchFamily="34" charset="-120"/>
               </a:rPr>
-              <a:t>  semantics</a:t>
+              <a:t>  - "src/notifications/**"</a:t>
             </a:r>
             <a:endParaRPr lang="en-US" sz="1400" dirty="0"/>
           </a:p>
@@ -17330,24 +17330,7 @@
                 <a:ea typeface="Consolas" pitchFamily="34" charset="-122"/>
                 <a:cs typeface="Consolas" pitchFamily="34" charset="-120"/>
               </a:rPr>
-              <a:t>globs: src/notifications/**</a:t>
-            </a:r>
-            <a:endParaRPr lang="en-US" sz="1400" dirty="0"/>
-          </a:p>
-          <a:p>
-            <a:pPr indent="0" marL="0">
-              <a:buNone/>
-            </a:pPr>
-            <a:r>
-              <a:rPr lang="en-US" sz="1400" dirty="0">
-                <a:solidFill>
-                  <a:schemeClr val="bg2"/>
-                </a:solidFill>
-                <a:latin typeface="Consolas" pitchFamily="34" charset="0"/>
-                <a:ea typeface="Consolas" pitchFamily="34" charset="-122"/>
-                <a:cs typeface="Consolas" pitchFamily="34" charset="-120"/>
-              </a:rPr>
-              <a:t>alwaysApply: false</a:t>
+              <a:t>  - "tests/notifications/**"</a:t>
             </a:r>
             <a:endParaRPr lang="en-US" sz="1400" dirty="0"/>
           </a:p>
@@ -20276,7 +20259,7 @@
                   <a:schemeClr val="accent3"/>
                 </a:solidFill>
               </a:rPr>
-              <a:t>claude or agent - use whichever you like. The moves are the same.</a:t>
+              <a:t>We demo in claude. If you use Cursor, every move has an equivalent.</a:t>
             </a:r>
             <a:endParaRPr lang="en-US" sz="1500" dirty="0"/>
           </a:p>
@@ -21861,10 +21844,17 @@
                           <a:solidFill>
                             <a:schemeClr val="tx1"/>
                           </a:solidFill>
+                          <a:latin typeface="Consolas" pitchFamily="34" charset="0"/>
+                          <a:ea typeface="Consolas" pitchFamily="34" charset="-122"/>
+                          <a:cs typeface="Consolas" pitchFamily="34" charset="-120"/>
                         </a:rPr>
-                        <a:t>CLAUDE.md (one screen) + docs</a:t>
+                        <a:t>.claude/rules/*.md + paths:</a:t>
                       </a:r>
-                      <a:endParaRPr lang="en-US" sz="1400" dirty="0"/>
+                      <a:endParaRPr lang="en-US" sz="1400" dirty="0">
+                        <a:latin typeface="Consolas" charset="0"/>
+                        <a:ea typeface="Consolas" charset="0"/>
+                        <a:cs typeface="Consolas" charset="0"/>
+                      </a:endParaRPr>
                     </a:p>
                   </a:txBody>
                   <a:tcPr marL="128016" marR="128016" marT="27432" marB="27432" anchor="ctr">
@@ -23975,7 +23965,7 @@
                   <a:schemeClr val="tx1"/>
                 </a:solidFill>
               </a:rPr>
-              <a:t>New goal, fresh context, in the Cursor CLI</a:t>
+              <a:t>New goal, fresh context</a:t>
             </a:r>
             <a:endParaRPr lang="en-US" sz="1800" dirty="0"/>
           </a:p>

--- a/presentation/vibe-vs-verified.pptx
+++ b/presentation/vibe-vs-verified.pptx
@@ -133,14 +133,14 @@
   <p:extLst>
     <p:ext uri="{521415D9-36F7-43E2-AB2F-B90AF26B5E84}">
       <p14:sectionLst xmlns:p14="http://schemas.microsoft.com/office/powerpoint/2010/main">
-        <p14:section name="Open" id="{0c86d74f-007e-1810-adbc-ea543e438bde}">
+        <p14:section name="Open" id="{32ad6a66-5285-74b9-1956-6aa2e5ea2a40}">
           <p14:sldIdLst>
             <p14:sldId id="256"/>
             <p14:sldId id="257"/>
             <p14:sldId id="258"/>
           </p14:sldIdLst>
         </p14:section>
-        <p14:section name="Theory 1 - Context" id="{4bd7b357-e757-452b-b498-26d0fd66136f}">
+        <p14:section name="Theory 1 - Context" id="{078abeba-5bb7-c4bd-939d-978f9a5a6a86}">
           <p14:sldIdLst>
             <p14:sldId id="259"/>
             <p14:sldId id="260"/>
@@ -148,12 +148,12 @@
             <p14:sldId id="262"/>
           </p14:sldIdLst>
         </p14:section>
-        <p14:section name="Demo 1 - Vibe" id="{7b5e6853-eebf-bb63-b00d-d782a7e818dd}">
+        <p14:section name="Demo 1 - Vibe" id="{37d71a93-590f-78f6-5788-d22bfa953bcc}">
           <p14:sldIdLst>
             <p14:sldId id="263"/>
           </p14:sldIdLst>
         </p14:section>
-        <p14:section name="Theory 2 - Planning" id="{ab9f51fa-e18e-c10d-e865-cb9bd5c218d5}">
+        <p14:section name="Theory 2 - Planning" id="{5e19671c-488b-0c40-71c8-9c585c9acef4}">
           <p14:sldIdLst>
             <p14:sldId id="264"/>
             <p14:sldId id="265"/>
@@ -164,12 +164,12 @@
             <p14:sldId id="270"/>
           </p14:sldIdLst>
         </p14:section>
-        <p14:section name="Demo 2 - Disciplined" id="{a63d7c43-6bf3-5f07-1378-b5e63b6b6a15}">
+        <p14:section name="Demo 2 - Disciplined" id="{09d0afa8-3a22-02ba-4171-b1046c7cecdc}">
           <p14:sldIdLst>
             <p14:sldId id="271"/>
           </p14:sldIdLst>
         </p14:section>
-        <p14:section name="Theory 3 - Context" id="{8773123d-37db-fe5a-2d6f-865f35254f87}">
+        <p14:section name="Theory 3 - Context" id="{a33524fc-9568-8f31-e237-d448f50f2485}">
           <p14:sldIdLst>
             <p14:sldId id="272"/>
             <p14:sldId id="273"/>
@@ -178,19 +178,19 @@
             <p14:sldId id="276"/>
           </p14:sldIdLst>
         </p14:section>
-        <p14:section name="Demo 3 - Fresh context" id="{ae5843b7-c474-07a9-59c2-559d2150c4e5}">
+        <p14:section name="Demo 3 - Fresh context" id="{b8a21e0f-5cc4-160e-5dc7-d6902efe4aa4}">
           <p14:sldIdLst>
             <p14:sldId id="277"/>
           </p14:sldIdLst>
         </p14:section>
-        <p14:section name="Close" id="{fc53ddf9-1d88-7cb5-509f-45d21a63f8f9}">
+        <p14:section name="Close" id="{3f4e8706-5a6c-380f-4306-ad645066b4e5}">
           <p14:sldIdLst>
             <p14:sldId id="278"/>
             <p14:sldId id="279"/>
             <p14:sldId id="280"/>
           </p14:sldIdLst>
         </p14:section>
-        <p14:section name="Backup" id="{cf46c551-a743-51a0-74d5-10434a08dc4f}">
+        <p14:section name="Backup" id="{7dfc6d74-82bd-f17d-39c2-ec0259afd3c3}">
           <p14:sldIdLst>
             <p14:sldId id="281"/>
             <p14:sldId id="282"/>
@@ -25913,7 +25913,7 @@
                   <a:schemeClr val="tx1"/>
                 </a:solidFill>
               </a:rPr>
-              <a:t>The repository is booby-trapped like a real one</a:t>
+              <a:t>Like any real codebase, some files look more relevant than they are</a:t>
             </a:r>
             <a:endParaRPr lang="en-US" sz="1800" dirty="0"/>
           </a:p>

--- a/presentation/vibe-vs-verified.pptx
+++ b/presentation/vibe-vs-verified.pptx
@@ -133,14 +133,14 @@
   <p:extLst>
     <p:ext uri="{521415D9-36F7-43E2-AB2F-B90AF26B5E84}">
       <p14:sectionLst xmlns:p14="http://schemas.microsoft.com/office/powerpoint/2010/main">
-        <p14:section name="Open" id="{32ad6a66-5285-74b9-1956-6aa2e5ea2a40}">
+        <p14:section name="Open" id="{789b8d8d-e3e0-06ac-c15d-38a95d7ee0c4}">
           <p14:sldIdLst>
             <p14:sldId id="256"/>
             <p14:sldId id="257"/>
             <p14:sldId id="258"/>
           </p14:sldIdLst>
         </p14:section>
-        <p14:section name="Theory 1 - Context" id="{078abeba-5bb7-c4bd-939d-978f9a5a6a86}">
+        <p14:section name="Theory 1 - Context" id="{acf9d185-8139-197b-affa-774700d5340a}">
           <p14:sldIdLst>
             <p14:sldId id="259"/>
             <p14:sldId id="260"/>
@@ -148,12 +148,12 @@
             <p14:sldId id="262"/>
           </p14:sldIdLst>
         </p14:section>
-        <p14:section name="Demo 1 - Vibe" id="{37d71a93-590f-78f6-5788-d22bfa953bcc}">
+        <p14:section name="Demo 1 - Vibe" id="{accfaffd-5de8-50de-f0b5-c9a47e89844e}">
           <p14:sldIdLst>
             <p14:sldId id="263"/>
           </p14:sldIdLst>
         </p14:section>
-        <p14:section name="Theory 2 - Planning" id="{5e19671c-488b-0c40-71c8-9c585c9acef4}">
+        <p14:section name="Theory 2 - Planning" id="{c17ef911-466b-e80a-cba3-991b33c966f1}">
           <p14:sldIdLst>
             <p14:sldId id="264"/>
             <p14:sldId id="265"/>
@@ -164,12 +164,12 @@
             <p14:sldId id="270"/>
           </p14:sldIdLst>
         </p14:section>
-        <p14:section name="Demo 2 - Disciplined" id="{09d0afa8-3a22-02ba-4171-b1046c7cecdc}">
+        <p14:section name="Demo 2 - Disciplined" id="{7180e49b-4be7-f226-41c0-7c6e0abb1fcd}">
           <p14:sldIdLst>
             <p14:sldId id="271"/>
           </p14:sldIdLst>
         </p14:section>
-        <p14:section name="Theory 3 - Context" id="{a33524fc-9568-8f31-e237-d448f50f2485}">
+        <p14:section name="Theory 3 - Context" id="{9d293e56-dd82-98b3-e0d5-412a006f7f2a}">
           <p14:sldIdLst>
             <p14:sldId id="272"/>
             <p14:sldId id="273"/>
@@ -178,19 +178,19 @@
             <p14:sldId id="276"/>
           </p14:sldIdLst>
         </p14:section>
-        <p14:section name="Demo 3 - Fresh context" id="{b8a21e0f-5cc4-160e-5dc7-d6902efe4aa4}">
+        <p14:section name="Demo 3 - Fresh context" id="{59f82a3e-9576-eeca-7a89-87bc01b9d90a}">
           <p14:sldIdLst>
             <p14:sldId id="277"/>
           </p14:sldIdLst>
         </p14:section>
-        <p14:section name="Close" id="{3f4e8706-5a6c-380f-4306-ad645066b4e5}">
+        <p14:section name="Close" id="{3f67a1d1-69c8-c2dd-c4e0-81fea9e02aec}">
           <p14:sldIdLst>
             <p14:sldId id="278"/>
             <p14:sldId id="279"/>
             <p14:sldId id="280"/>
           </p14:sldIdLst>
         </p14:section>
-        <p14:section name="Backup" id="{7dfc6d74-82bd-f17d-39c2-ec0259afd3c3}">
+        <p14:section name="Backup" id="{2f6ed937-ddb1-0b8e-f159-49203a8ed82d}">
           <p14:sldIdLst>
             <p14:sldId id="281"/>
             <p14:sldId id="282"/>
@@ -1920,7 +1920,7 @@
           <a:p>
             <a:r>
               <a:rPr lang="en-US" dirty="0"/>
-              <a:t>BOTH. Eugene switches to the race terminal - the scoreboard prints when both lanes finish (results also saved in demo-kit/results/). Adam reads the rows top-down: correctness first, then tokens and context, then files. The numbers on this slide are from a rehearsal run - the fallback if the live race hasn't finished; say so if you use them. The failed vibe task is free shipping: 'over £100' became '&gt; 10000' and express went free too. Then cost and context: a third more spend for a worse result. Files read is a wash on this repo - good docs keep both lanes on the right files - so don't oversell it.</a:t>
+              <a:t>BOTH. Eugene switches to the race terminal - the scoreboard prints when both lanes finish (results also saved in demo-kit/results/). Adam reads the rows top-down: they are slide 7's six scorecard measures, correctness first, then cost. The numbers on this slide are from a rehearsal run - the fallback if the live race hasn't finished; say so if you use them. The failed vibe task is free shipping: 'over £100' became '&gt; 10000' and express went free too. Then cost and context: a third more spend for a worse result. Files read is a wash on this repo - good docs keep both lanes on the right files - so don't oversell it.</a:t>
             </a:r>
             <a:endParaRPr lang="en-US" dirty="0"/>
           </a:p>
@@ -17613,7 +17613,7 @@
                 <a:gridCol w="1828800"/>
                 <a:gridCol w="1828800"/>
               </a:tblGrid>
-              <a:tr h="512064">
+              <a:tr h="457200">
                 <a:tc>
                   <a:txBody>
                     <a:bodyPr/>
@@ -17623,14 +17623,14 @@
                         <a:buNone/>
                       </a:pPr>
                       <a:r>
-                        <a:rPr lang="en-US" sz="1500" b="1" dirty="0">
+                        <a:rPr lang="en-US" sz="1400" b="1" dirty="0">
                           <a:solidFill>
                             <a:schemeClr val="bg1"/>
                           </a:solidFill>
                         </a:rPr>
                         <a:t>Metric</a:t>
                       </a:r>
-                      <a:endParaRPr lang="en-US" sz="1500" dirty="0"/>
+                      <a:endParaRPr lang="en-US" sz="1400" dirty="0"/>
                     </a:p>
                   </a:txBody>
                   <a:tcPr marL="128016" marR="128016" marT="36576" marB="36576" anchor="ctr">
@@ -17684,14 +17684,14 @@
                         <a:buNone/>
                       </a:pPr>
                       <a:r>
-                        <a:rPr lang="en-US" sz="1500" b="1" dirty="0">
+                        <a:rPr lang="en-US" sz="1400" b="1" dirty="0">
                           <a:solidFill>
                             <a:schemeClr val="bg1"/>
                           </a:solidFill>
                         </a:rPr>
                         <a:t>Vibe</a:t>
                       </a:r>
-                      <a:endParaRPr lang="en-US" sz="1500" dirty="0"/>
+                      <a:endParaRPr lang="en-US" sz="1400" dirty="0"/>
                     </a:p>
                   </a:txBody>
                   <a:tcPr marL="128016" marR="128016" marT="36576" marB="36576" anchor="ctr">
@@ -17745,14 +17745,14 @@
                         <a:buNone/>
                       </a:pPr>
                       <a:r>
-                        <a:rPr lang="en-US" sz="1500" b="1" dirty="0">
+                        <a:rPr lang="en-US" sz="1400" b="1" dirty="0">
                           <a:solidFill>
                             <a:schemeClr val="bg1"/>
                           </a:solidFill>
                         </a:rPr>
                         <a:t>Disciplined</a:t>
                       </a:r>
-                      <a:endParaRPr lang="en-US" sz="1500" dirty="0"/>
+                      <a:endParaRPr lang="en-US" sz="1400" dirty="0"/>
                     </a:p>
                   </a:txBody>
                   <a:tcPr marL="128016" marR="128016" marT="36576" marB="36576" anchor="ctr">
@@ -17798,7 +17798,7 @@
                   </a:tcPr>
                 </a:tc>
               </a:tr>
-              <a:tr h="512064">
+              <a:tr h="457200">
                 <a:tc>
                   <a:txBody>
                     <a:bodyPr/>
@@ -17808,14 +17808,14 @@
                         <a:buNone/>
                       </a:pPr>
                       <a:r>
-                        <a:rPr lang="en-US" sz="1500" b="1" dirty="0">
+                        <a:rPr lang="en-US" sz="1400" b="1" dirty="0">
                           <a:solidFill>
                             <a:schemeClr val="tx1"/>
                           </a:solidFill>
                         </a:rPr>
-                        <a:t>Tasks that passed hidden verification</a:t>
+                        <a:t>Hidden verification passed</a:t>
                       </a:r>
-                      <a:endParaRPr lang="en-US" sz="1500" dirty="0"/>
+                      <a:endParaRPr lang="en-US" sz="1400" dirty="0"/>
                     </a:p>
                   </a:txBody>
                   <a:tcPr marL="128016" marR="128016" marT="36576" marB="36576" anchor="ctr">
@@ -17866,14 +17866,14 @@
                         <a:buNone/>
                       </a:pPr>
                       <a:r>
-                        <a:rPr lang="en-US" sz="1500" dirty="0">
+                        <a:rPr lang="en-US" sz="1400" dirty="0">
                           <a:solidFill>
                             <a:schemeClr val="tx1"/>
                           </a:solidFill>
                         </a:rPr>
                         <a:t>2 / 3</a:t>
                       </a:r>
-                      <a:endParaRPr lang="en-US" sz="1500" dirty="0"/>
+                      <a:endParaRPr lang="en-US" sz="1400" dirty="0"/>
                     </a:p>
                   </a:txBody>
                   <a:tcPr marL="128016" marR="128016" marT="36576" marB="36576" anchor="ctr">
@@ -17924,14 +17924,14 @@
                         <a:buNone/>
                       </a:pPr>
                       <a:r>
-                        <a:rPr lang="en-US" sz="1500" dirty="0">
+                        <a:rPr lang="en-US" sz="1400" dirty="0">
                           <a:solidFill>
                             <a:schemeClr val="tx1"/>
                           </a:solidFill>
                         </a:rPr>
                         <a:t>3 / 3</a:t>
                       </a:r>
-                      <a:endParaRPr lang="en-US" sz="1500" dirty="0"/>
+                      <a:endParaRPr lang="en-US" sz="1400" dirty="0"/>
                     </a:p>
                   </a:txBody>
                   <a:tcPr marL="128016" marR="128016" marT="36576" marB="36576" anchor="ctr">
@@ -17974,7 +17974,7 @@
                   </a:tcPr>
                 </a:tc>
               </a:tr>
-              <a:tr h="512064">
+              <a:tr h="457200">
                 <a:tc>
                   <a:txBody>
                     <a:bodyPr/>
@@ -17984,14 +17984,14 @@
                         <a:buNone/>
                       </a:pPr>
                       <a:r>
-                        <a:rPr lang="en-US" sz="1500" b="1" dirty="0">
+                        <a:rPr lang="en-US" sz="1400" b="1" dirty="0">
                           <a:solidFill>
                             <a:schemeClr val="tx1"/>
                           </a:solidFill>
                         </a:rPr>
-                        <a:t>Tokens processed</a:t>
+                        <a:t>Files read / files that mattered</a:t>
                       </a:r>
-                      <a:endParaRPr lang="en-US" sz="1500" dirty="0"/>
+                      <a:endParaRPr lang="en-US" sz="1400" dirty="0"/>
                     </a:p>
                   </a:txBody>
                   <a:tcPr marL="128016" marR="128016" marT="36576" marB="36576" anchor="ctr">
@@ -18042,14 +18042,14 @@
                         <a:buNone/>
                       </a:pPr>
                       <a:r>
-                        <a:rPr lang="en-US" sz="1500" dirty="0">
+                        <a:rPr lang="en-US" sz="1400" dirty="0">
                           <a:solidFill>
                             <a:schemeClr val="tx1"/>
                           </a:solidFill>
                         </a:rPr>
-                        <a:t>907k</a:t>
+                        <a:t>7 / 7</a:t>
                       </a:r>
-                      <a:endParaRPr lang="en-US" sz="1500" dirty="0"/>
+                      <a:endParaRPr lang="en-US" sz="1400" dirty="0"/>
                     </a:p>
                   </a:txBody>
                   <a:tcPr marL="128016" marR="128016" marT="36576" marB="36576" anchor="ctr">
@@ -18100,14 +18100,14 @@
                         <a:buNone/>
                       </a:pPr>
                       <a:r>
-                        <a:rPr lang="en-US" sz="1500" dirty="0">
+                        <a:rPr lang="en-US" sz="1400" dirty="0">
                           <a:solidFill>
                             <a:schemeClr val="tx1"/>
                           </a:solidFill>
                         </a:rPr>
-                        <a:t>729k</a:t>
+                        <a:t>9 / 8</a:t>
                       </a:r>
-                      <a:endParaRPr lang="en-US" sz="1500" dirty="0"/>
+                      <a:endParaRPr lang="en-US" sz="1400" dirty="0"/>
                     </a:p>
                   </a:txBody>
                   <a:tcPr marL="128016" marR="128016" marT="36576" marB="36576" anchor="ctr">
@@ -18150,7 +18150,7 @@
                   </a:tcPr>
                 </a:tc>
               </a:tr>
-              <a:tr h="512064">
+              <a:tr h="457200">
                 <a:tc>
                   <a:txBody>
                     <a:bodyPr/>
@@ -18160,14 +18160,14 @@
                         <a:buNone/>
                       </a:pPr>
                       <a:r>
-                        <a:rPr lang="en-US" sz="1500" b="1" dirty="0">
+                        <a:rPr lang="en-US" sz="1400" b="1" dirty="0">
                           <a:solidFill>
                             <a:schemeClr val="tx1"/>
                           </a:solidFill>
                         </a:rPr>
-                        <a:t>Peak context</a:t>
+                        <a:t>Prompts (corrections)</a:t>
                       </a:r>
-                      <a:endParaRPr lang="en-US" sz="1500" dirty="0"/>
+                      <a:endParaRPr lang="en-US" sz="1400" dirty="0"/>
                     </a:p>
                   </a:txBody>
                   <a:tcPr marL="128016" marR="128016" marT="36576" marB="36576" anchor="ctr">
@@ -18218,14 +18218,14 @@
                         <a:buNone/>
                       </a:pPr>
                       <a:r>
-                        <a:rPr lang="en-US" sz="1500" dirty="0">
+                        <a:rPr lang="en-US" sz="1400" dirty="0">
                           <a:solidFill>
                             <a:schemeClr val="tx1"/>
                           </a:solidFill>
                         </a:rPr>
-                        <a:t>60.0k</a:t>
+                        <a:t>3 (0)</a:t>
                       </a:r>
-                      <a:endParaRPr lang="en-US" sz="1500" dirty="0"/>
+                      <a:endParaRPr lang="en-US" sz="1400" dirty="0"/>
                     </a:p>
                   </a:txBody>
                   <a:tcPr marL="128016" marR="128016" marT="36576" marB="36576" anchor="ctr">
@@ -18276,14 +18276,14 @@
                         <a:buNone/>
                       </a:pPr>
                       <a:r>
-                        <a:rPr lang="en-US" sz="1500" dirty="0">
+                        <a:rPr lang="en-US" sz="1400" dirty="0">
                           <a:solidFill>
                             <a:schemeClr val="tx1"/>
                           </a:solidFill>
                         </a:rPr>
-                        <a:t>51.3k</a:t>
+                        <a:t>3 (0)</a:t>
                       </a:r>
-                      <a:endParaRPr lang="en-US" sz="1500" dirty="0"/>
+                      <a:endParaRPr lang="en-US" sz="1400" dirty="0"/>
                     </a:p>
                   </a:txBody>
                   <a:tcPr marL="128016" marR="128016" marT="36576" marB="36576" anchor="ctr">
@@ -18326,7 +18326,7 @@
                   </a:tcPr>
                 </a:tc>
               </a:tr>
-              <a:tr h="512064">
+              <a:tr h="457200">
                 <a:tc>
                   <a:txBody>
                     <a:bodyPr/>
@@ -18336,14 +18336,14 @@
                         <a:buNone/>
                       </a:pPr>
                       <a:r>
-                        <a:rPr lang="en-US" sz="1500" b="1" dirty="0">
+                        <a:rPr lang="en-US" sz="1400" b="1" dirty="0">
                           <a:solidFill>
                             <a:schemeClr val="tx1"/>
                           </a:solidFill>
                         </a:rPr>
-                        <a:t>Cost</a:t>
+                        <a:t>Full / focused test runs</a:t>
                       </a:r>
-                      <a:endParaRPr lang="en-US" sz="1500" dirty="0"/>
+                      <a:endParaRPr lang="en-US" sz="1400" dirty="0"/>
                     </a:p>
                   </a:txBody>
                   <a:tcPr marL="128016" marR="128016" marT="36576" marB="36576" anchor="ctr">
@@ -18394,14 +18394,14 @@
                         <a:buNone/>
                       </a:pPr>
                       <a:r>
-                        <a:rPr lang="en-US" sz="1500" dirty="0">
+                        <a:rPr lang="en-US" sz="1400" dirty="0">
                           <a:solidFill>
                             <a:schemeClr val="tx1"/>
                           </a:solidFill>
                         </a:rPr>
-                        <a:t>$0.90</a:t>
+                        <a:t>5 / 0</a:t>
                       </a:r>
-                      <a:endParaRPr lang="en-US" sz="1500" dirty="0"/>
+                      <a:endParaRPr lang="en-US" sz="1400" dirty="0"/>
                     </a:p>
                   </a:txBody>
                   <a:tcPr marL="128016" marR="128016" marT="36576" marB="36576" anchor="ctr">
@@ -18452,14 +18452,14 @@
                         <a:buNone/>
                       </a:pPr>
                       <a:r>
-                        <a:rPr lang="en-US" sz="1500" dirty="0">
+                        <a:rPr lang="en-US" sz="1400" dirty="0">
                           <a:solidFill>
                             <a:schemeClr val="tx1"/>
                           </a:solidFill>
                         </a:rPr>
-                        <a:t>$0.60</a:t>
+                        <a:t>0 / 3</a:t>
                       </a:r>
-                      <a:endParaRPr lang="en-US" sz="1500" dirty="0"/>
+                      <a:endParaRPr lang="en-US" sz="1400" dirty="0"/>
                     </a:p>
                   </a:txBody>
                   <a:tcPr marL="128016" marR="128016" marT="36576" marB="36576" anchor="ctr">
@@ -18502,7 +18502,7 @@
                   </a:tcPr>
                 </a:tc>
               </a:tr>
-              <a:tr h="512064">
+              <a:tr h="457200">
                 <a:tc>
                   <a:txBody>
                     <a:bodyPr/>
@@ -18512,14 +18512,14 @@
                         <a:buNone/>
                       </a:pPr>
                       <a:r>
-                        <a:rPr lang="en-US" sz="1500" b="1" dirty="0">
+                        <a:rPr lang="en-US" sz="1400" b="1" dirty="0">
                           <a:solidFill>
                             <a:schemeClr val="tx1"/>
                           </a:solidFill>
                         </a:rPr>
-                        <a:t>Full / focused test runs</a:t>
+                        <a:t>Files changed that didn't need to</a:t>
                       </a:r>
-                      <a:endParaRPr lang="en-US" sz="1500" dirty="0"/>
+                      <a:endParaRPr lang="en-US" sz="1400" dirty="0"/>
                     </a:p>
                   </a:txBody>
                   <a:tcPr marL="128016" marR="128016" marT="36576" marB="36576" anchor="ctr">
@@ -18570,14 +18570,14 @@
                         <a:buNone/>
                       </a:pPr>
                       <a:r>
-                        <a:rPr lang="en-US" sz="1500" dirty="0">
+                        <a:rPr lang="en-US" sz="1400" dirty="0">
                           <a:solidFill>
                             <a:schemeClr val="tx1"/>
                           </a:solidFill>
                         </a:rPr>
-                        <a:t>5 / 0</a:t>
+                        <a:t>1</a:t>
                       </a:r>
-                      <a:endParaRPr lang="en-US" sz="1500" dirty="0"/>
+                      <a:endParaRPr lang="en-US" sz="1400" dirty="0"/>
                     </a:p>
                   </a:txBody>
                   <a:tcPr marL="128016" marR="128016" marT="36576" marB="36576" anchor="ctr">
@@ -18628,14 +18628,14 @@
                         <a:buNone/>
                       </a:pPr>
                       <a:r>
-                        <a:rPr lang="en-US" sz="1500" dirty="0">
+                        <a:rPr lang="en-US" sz="1400" dirty="0">
                           <a:solidFill>
                             <a:schemeClr val="tx1"/>
                           </a:solidFill>
                         </a:rPr>
-                        <a:t>0 / 3</a:t>
+                        <a:t>1</a:t>
                       </a:r>
-                      <a:endParaRPr lang="en-US" sz="1500" dirty="0"/>
+                      <a:endParaRPr lang="en-US" sz="1400" dirty="0"/>
                     </a:p>
                   </a:txBody>
                   <a:tcPr marL="128016" marR="128016" marT="36576" marB="36576" anchor="ctr">
@@ -18678,7 +18678,7 @@
                   </a:tcPr>
                 </a:tc>
               </a:tr>
-              <a:tr h="512064">
+              <a:tr h="457200">
                 <a:tc>
                   <a:txBody>
                     <a:bodyPr/>
@@ -18688,14 +18688,14 @@
                         <a:buNone/>
                       </a:pPr>
                       <a:r>
-                        <a:rPr lang="en-US" sz="1500" b="1" dirty="0">
+                        <a:rPr lang="en-US" sz="1400" b="1" dirty="0">
                           <a:solidFill>
                             <a:schemeClr val="tx1"/>
                           </a:solidFill>
                         </a:rPr>
-                        <a:t>Files read · relevant ratio</a:t>
+                        <a:t>Peak context</a:t>
                       </a:r>
-                      <a:endParaRPr lang="en-US" sz="1500" dirty="0"/>
+                      <a:endParaRPr lang="en-US" sz="1400" dirty="0"/>
                     </a:p>
                   </a:txBody>
                   <a:tcPr marL="128016" marR="128016" marT="36576" marB="36576" anchor="ctr">
@@ -18746,14 +18746,14 @@
                         <a:buNone/>
                       </a:pPr>
                       <a:r>
-                        <a:rPr lang="en-US" sz="1500" dirty="0">
+                        <a:rPr lang="en-US" sz="1400" dirty="0">
                           <a:solidFill>
                             <a:schemeClr val="tx1"/>
                           </a:solidFill>
                         </a:rPr>
-                        <a:t>7 · 100%</a:t>
+                        <a:t>60.0k</a:t>
                       </a:r>
-                      <a:endParaRPr lang="en-US" sz="1500" dirty="0"/>
+                      <a:endParaRPr lang="en-US" sz="1400" dirty="0"/>
                     </a:p>
                   </a:txBody>
                   <a:tcPr marL="128016" marR="128016" marT="36576" marB="36576" anchor="ctr">
@@ -18804,14 +18804,14 @@
                         <a:buNone/>
                       </a:pPr>
                       <a:r>
-                        <a:rPr lang="en-US" sz="1500" dirty="0">
+                        <a:rPr lang="en-US" sz="1400" dirty="0">
                           <a:solidFill>
                             <a:schemeClr val="tx1"/>
                           </a:solidFill>
                         </a:rPr>
-                        <a:t>9 · 89%</a:t>
+                        <a:t>51.3k</a:t>
                       </a:r>
-                      <a:endParaRPr lang="en-US" sz="1500" dirty="0"/>
+                      <a:endParaRPr lang="en-US" sz="1400" dirty="0"/>
                     </a:p>
                   </a:txBody>
                   <a:tcPr marL="128016" marR="128016" marT="36576" marB="36576" anchor="ctr">
@@ -18854,7 +18854,7 @@
                   </a:tcPr>
                 </a:tc>
               </a:tr>
-              <a:tr h="512064">
+              <a:tr h="457200">
                 <a:tc>
                   <a:txBody>
                     <a:bodyPr/>
@@ -18864,14 +18864,14 @@
                         <a:buNone/>
                       </a:pPr>
                       <a:r>
-                        <a:rPr lang="en-US" sz="1500" b="1" dirty="0">
+                        <a:rPr lang="en-US" sz="1400" b="1" dirty="0">
                           <a:solidFill>
                             <a:schemeClr val="tx1"/>
                           </a:solidFill>
                         </a:rPr>
-                        <a:t>Agent minutes</a:t>
+                        <a:t>Cost · tokens processed</a:t>
                       </a:r>
-                      <a:endParaRPr lang="en-US" sz="1500" dirty="0"/>
+                      <a:endParaRPr lang="en-US" sz="1400" dirty="0"/>
                     </a:p>
                   </a:txBody>
                   <a:tcPr marL="128016" marR="128016" marT="36576" marB="36576" anchor="ctr">
@@ -18922,14 +18922,14 @@
                         <a:buNone/>
                       </a:pPr>
                       <a:r>
-                        <a:rPr lang="en-US" sz="1500" dirty="0">
+                        <a:rPr lang="en-US" sz="1400" dirty="0">
                           <a:solidFill>
                             <a:schemeClr val="tx1"/>
                           </a:solidFill>
                         </a:rPr>
-                        <a:t>2.2</a:t>
+                        <a:t>$0.90 · 907k</a:t>
                       </a:r>
-                      <a:endParaRPr lang="en-US" sz="1500" dirty="0"/>
+                      <a:endParaRPr lang="en-US" sz="1400" dirty="0"/>
                     </a:p>
                   </a:txBody>
                   <a:tcPr marL="128016" marR="128016" marT="36576" marB="36576" anchor="ctr">
@@ -18980,14 +18980,190 @@
                         <a:buNone/>
                       </a:pPr>
                       <a:r>
-                        <a:rPr lang="en-US" sz="1500" dirty="0">
+                        <a:rPr lang="en-US" sz="1400" dirty="0">
+                          <a:solidFill>
+                            <a:schemeClr val="tx1"/>
+                          </a:solidFill>
+                        </a:rPr>
+                        <a:t>$0.60 · 729k</a:t>
+                      </a:r>
+                      <a:endParaRPr lang="en-US" sz="1400" dirty="0"/>
+                    </a:p>
+                  </a:txBody>
+                  <a:tcPr marL="128016" marR="128016" marT="36576" marB="36576" anchor="ctr">
+                    <a:lnL w="12700" cap="flat" cmpd="sng" algn="ctr">
+                      <a:solidFill>
+                        <a:srgbClr val="EAF0F4"/>
+                      </a:solidFill>
+                      <a:prstDash val="solid"/>
+                      <a:round/>
+                      <a:headEnd type="none" w="med" len="med"/>
+                      <a:tailEnd type="none" w="med" len="med"/>
+                    </a:lnL>
+                    <a:lnR w="12700" cap="flat" cmpd="sng" algn="ctr">
+                      <a:solidFill>
+                        <a:srgbClr val="EAF0F4"/>
+                      </a:solidFill>
+                      <a:prstDash val="solid"/>
+                      <a:round/>
+                      <a:headEnd type="none" w="med" len="med"/>
+                      <a:tailEnd type="none" w="med" len="med"/>
+                    </a:lnR>
+                    <a:lnT w="12700" cap="flat" cmpd="sng" algn="ctr">
+                      <a:solidFill>
+                        <a:srgbClr val="EAF0F4"/>
+                      </a:solidFill>
+                      <a:prstDash val="solid"/>
+                      <a:round/>
+                      <a:headEnd type="none" w="med" len="med"/>
+                      <a:tailEnd type="none" w="med" len="med"/>
+                    </a:lnT>
+                    <a:lnB w="12700" cap="flat" cmpd="sng" algn="ctr">
+                      <a:solidFill>
+                        <a:srgbClr val="EAF0F4"/>
+                      </a:solidFill>
+                      <a:prstDash val="solid"/>
+                      <a:round/>
+                      <a:headEnd type="none" w="med" len="med"/>
+                      <a:tailEnd type="none" w="med" len="med"/>
+                    </a:lnB>
+                  </a:tcPr>
+                </a:tc>
+              </a:tr>
+              <a:tr h="457200">
+                <a:tc>
+                  <a:txBody>
+                    <a:bodyPr/>
+                    <a:lstStyle/>
+                    <a:p>
+                      <a:pPr indent="0" marL="0">
+                        <a:buNone/>
+                      </a:pPr>
+                      <a:r>
+                        <a:rPr lang="en-US" sz="1400" b="1" dirty="0">
+                          <a:solidFill>
+                            <a:schemeClr val="tx1"/>
+                          </a:solidFill>
+                        </a:rPr>
+                        <a:t>Agent minutes</a:t>
+                      </a:r>
+                      <a:endParaRPr lang="en-US" sz="1400" dirty="0"/>
+                    </a:p>
+                  </a:txBody>
+                  <a:tcPr marL="128016" marR="128016" marT="36576" marB="36576" anchor="ctr">
+                    <a:lnL w="12700" cap="flat" cmpd="sng" algn="ctr">
+                      <a:solidFill>
+                        <a:srgbClr val="EAF0F4"/>
+                      </a:solidFill>
+                      <a:prstDash val="solid"/>
+                      <a:round/>
+                      <a:headEnd type="none" w="med" len="med"/>
+                      <a:tailEnd type="none" w="med" len="med"/>
+                    </a:lnL>
+                    <a:lnR w="12700" cap="flat" cmpd="sng" algn="ctr">
+                      <a:solidFill>
+                        <a:srgbClr val="EAF0F4"/>
+                      </a:solidFill>
+                      <a:prstDash val="solid"/>
+                      <a:round/>
+                      <a:headEnd type="none" w="med" len="med"/>
+                      <a:tailEnd type="none" w="med" len="med"/>
+                    </a:lnR>
+                    <a:lnT w="12700" cap="flat" cmpd="sng" algn="ctr">
+                      <a:solidFill>
+                        <a:srgbClr val="EAF0F4"/>
+                      </a:solidFill>
+                      <a:prstDash val="solid"/>
+                      <a:round/>
+                      <a:headEnd type="none" w="med" len="med"/>
+                      <a:tailEnd type="none" w="med" len="med"/>
+                    </a:lnT>
+                    <a:lnB w="12700" cap="flat" cmpd="sng" algn="ctr">
+                      <a:solidFill>
+                        <a:srgbClr val="EAF0F4"/>
+                      </a:solidFill>
+                      <a:prstDash val="solid"/>
+                      <a:round/>
+                      <a:headEnd type="none" w="med" len="med"/>
+                      <a:tailEnd type="none" w="med" len="med"/>
+                    </a:lnB>
+                  </a:tcPr>
+                </a:tc>
+                <a:tc>
+                  <a:txBody>
+                    <a:bodyPr/>
+                    <a:lstStyle/>
+                    <a:p>
+                      <a:pPr algn="ctr" indent="0" marL="0">
+                        <a:buNone/>
+                      </a:pPr>
+                      <a:r>
+                        <a:rPr lang="en-US" sz="1400" dirty="0">
+                          <a:solidFill>
+                            <a:schemeClr val="tx1"/>
+                          </a:solidFill>
+                        </a:rPr>
+                        <a:t>2.2</a:t>
+                      </a:r>
+                      <a:endParaRPr lang="en-US" sz="1400" dirty="0"/>
+                    </a:p>
+                  </a:txBody>
+                  <a:tcPr marL="128016" marR="128016" marT="36576" marB="36576" anchor="ctr">
+                    <a:lnL w="12700" cap="flat" cmpd="sng" algn="ctr">
+                      <a:solidFill>
+                        <a:srgbClr val="EAF0F4"/>
+                      </a:solidFill>
+                      <a:prstDash val="solid"/>
+                      <a:round/>
+                      <a:headEnd type="none" w="med" len="med"/>
+                      <a:tailEnd type="none" w="med" len="med"/>
+                    </a:lnL>
+                    <a:lnR w="12700" cap="flat" cmpd="sng" algn="ctr">
+                      <a:solidFill>
+                        <a:srgbClr val="EAF0F4"/>
+                      </a:solidFill>
+                      <a:prstDash val="solid"/>
+                      <a:round/>
+                      <a:headEnd type="none" w="med" len="med"/>
+                      <a:tailEnd type="none" w="med" len="med"/>
+                    </a:lnR>
+                    <a:lnT w="12700" cap="flat" cmpd="sng" algn="ctr">
+                      <a:solidFill>
+                        <a:srgbClr val="EAF0F4"/>
+                      </a:solidFill>
+                      <a:prstDash val="solid"/>
+                      <a:round/>
+                      <a:headEnd type="none" w="med" len="med"/>
+                      <a:tailEnd type="none" w="med" len="med"/>
+                    </a:lnT>
+                    <a:lnB w="12700" cap="flat" cmpd="sng" algn="ctr">
+                      <a:solidFill>
+                        <a:srgbClr val="EAF0F4"/>
+                      </a:solidFill>
+                      <a:prstDash val="solid"/>
+                      <a:round/>
+                      <a:headEnd type="none" w="med" len="med"/>
+                      <a:tailEnd type="none" w="med" len="med"/>
+                    </a:lnB>
+                  </a:tcPr>
+                </a:tc>
+                <a:tc>
+                  <a:txBody>
+                    <a:bodyPr/>
+                    <a:lstStyle/>
+                    <a:p>
+                      <a:pPr algn="ctr" indent="0" marL="0">
+                        <a:buNone/>
+                      </a:pPr>
+                      <a:r>
+                        <a:rPr lang="en-US" sz="1400" dirty="0">
                           <a:solidFill>
                             <a:schemeClr val="tx1"/>
                           </a:solidFill>
                         </a:rPr>
                         <a:t>1.7</a:t>
                       </a:r>
-                      <a:endParaRPr lang="en-US" sz="1500" dirty="0"/>
+                      <a:endParaRPr lang="en-US" sz="1400" dirty="0"/>
                     </a:p>
                   </a:txBody>
                   <a:tcPr marL="128016" marR="128016" marT="36576" marB="36576" anchor="ctr">
@@ -27699,7 +27875,7 @@
                             <a:schemeClr val="tx1"/>
                           </a:solidFill>
                         </a:rPr>
-                        <a:t>Context % at the end</a:t>
+                        <a:t>Peak context</a:t>
                       </a:r>
                       <a:endParaRPr lang="en-US" sz="1400" dirty="0"/>
                     </a:p>
@@ -27757,7 +27933,7 @@
                             <a:schemeClr val="tx1"/>
                           </a:solidFill>
                         </a:rPr>
-                        <a:t>Claude Code: /context · Cursor CLI: context % status line</a:t>
+                        <a:t>/context or the status line · Cursor: context % status line</a:t>
                       </a:r>
                       <a:endParaRPr lang="en-US" sz="1400" dirty="0"/>
                     </a:p>

--- a/presentation/vibe-vs-verified.pptx
+++ b/presentation/vibe-vs-verified.pptx
@@ -133,14 +133,14 @@
   <p:extLst>
     <p:ext uri="{521415D9-36F7-43E2-AB2F-B90AF26B5E84}">
       <p14:sectionLst xmlns:p14="http://schemas.microsoft.com/office/powerpoint/2010/main">
-        <p14:section name="Open" id="{789b8d8d-e3e0-06ac-c15d-38a95d7ee0c4}">
+        <p14:section name="Open" id="{9cc60ae2-a466-9c7c-af6f-6c379591c664}">
           <p14:sldIdLst>
             <p14:sldId id="256"/>
             <p14:sldId id="257"/>
             <p14:sldId id="258"/>
           </p14:sldIdLst>
         </p14:section>
-        <p14:section name="Theory 1 - Context" id="{acf9d185-8139-197b-affa-774700d5340a}">
+        <p14:section name="Theory 1 - Context" id="{60a0d2ef-ceb5-80c9-c8fe-15ecc5967089}">
           <p14:sldIdLst>
             <p14:sldId id="259"/>
             <p14:sldId id="260"/>
@@ -148,12 +148,12 @@
             <p14:sldId id="262"/>
           </p14:sldIdLst>
         </p14:section>
-        <p14:section name="Demo 1 - Vibe" id="{accfaffd-5de8-50de-f0b5-c9a47e89844e}">
+        <p14:section name="Demo 1 - Vibe" id="{e059ac13-4e8e-c914-293a-18d6f58d4982}">
           <p14:sldIdLst>
             <p14:sldId id="263"/>
           </p14:sldIdLst>
         </p14:section>
-        <p14:section name="Theory 2 - Planning" id="{c17ef911-466b-e80a-cba3-991b33c966f1}">
+        <p14:section name="Theory 2 - Planning" id="{0fdffc44-07d6-618c-6273-cd2c923180e4}">
           <p14:sldIdLst>
             <p14:sldId id="264"/>
             <p14:sldId id="265"/>
@@ -164,12 +164,12 @@
             <p14:sldId id="270"/>
           </p14:sldIdLst>
         </p14:section>
-        <p14:section name="Demo 2 - Disciplined" id="{7180e49b-4be7-f226-41c0-7c6e0abb1fcd}">
+        <p14:section name="Demo 2 - Disciplined" id="{07824460-252d-6005-f9ec-92c06a28ca5e}">
           <p14:sldIdLst>
             <p14:sldId id="271"/>
           </p14:sldIdLst>
         </p14:section>
-        <p14:section name="Theory 3 - Context" id="{9d293e56-dd82-98b3-e0d5-412a006f7f2a}">
+        <p14:section name="Theory 3 - Context" id="{c1f583f5-0416-715e-16dd-e90bce234bc3}">
           <p14:sldIdLst>
             <p14:sldId id="272"/>
             <p14:sldId id="273"/>
@@ -178,19 +178,19 @@
             <p14:sldId id="276"/>
           </p14:sldIdLst>
         </p14:section>
-        <p14:section name="Demo 3 - Fresh context" id="{59f82a3e-9576-eeca-7a89-87bc01b9d90a}">
+        <p14:section name="Demo 3 - Fresh context" id="{4f5337b5-2fda-9b92-5066-6167b9b7e151}">
           <p14:sldIdLst>
             <p14:sldId id="277"/>
           </p14:sldIdLst>
         </p14:section>
-        <p14:section name="Close" id="{3f67a1d1-69c8-c2dd-c4e0-81fea9e02aec}">
+        <p14:section name="Close" id="{8e7b8d7b-d199-c106-3d89-df6c32af8799}">
           <p14:sldIdLst>
             <p14:sldId id="278"/>
             <p14:sldId id="279"/>
             <p14:sldId id="280"/>
           </p14:sldIdLst>
         </p14:section>
-        <p14:section name="Backup" id="{2f6ed937-ddb1-0b8e-f159-49203a8ed82d}">
+        <p14:section name="Backup" id="{42bdc90e-1efb-5ca3-c15e-dab297950008}">
           <p14:sldIdLst>
             <p14:sldId id="281"/>
             <p14:sldId id="282"/>
@@ -1568,7 +1568,7 @@
           <a:p>
             <a:r>
               <a:rPr lang="en-US" dirty="0"/>
-              <a:t>ADAM. [Eugene starts `node race.mjs` on the second screen/terminal NOW if not already running.] Before we explain anything, we've started two Claude Code agents on the same three tickets in this repo. One gets prompts the way we all write them at 4pm on a Thursday. The other gets the habits we're about to teach. Same model. We'll come back at the end and see who finished, who was right, and what it cost.</a:t>
+              <a:t>ADAM. [Eugene starts `node race.mjs` on the second screen/terminal NOW if not already running.] Before we explain anything, we've started two Claude Code agents on the same four tickets in this repo. One gets prompts the way we all write them at 4pm on a Thursday. The other gets the habits we're about to teach. Same model. When both finish, QA checks the work and sends any failures back once - same report to both - because in real life a wrong answer comes back to you. We'll come back at the end and see who was right, and what it cost including the rework.</a:t>
             </a:r>
             <a:endParaRPr lang="en-US" dirty="0"/>
           </a:p>
@@ -1920,7 +1920,7 @@
           <a:p>
             <a:r>
               <a:rPr lang="en-US" dirty="0"/>
-              <a:t>BOTH. Eugene switches to the race terminal - the scoreboard prints when both lanes finish (results also saved in demo-kit/results/). Adam reads the rows top-down: they are slide 7's six scorecard measures, correctness first, then cost. The numbers on this slide are from a rehearsal run - the fallback if the live race hasn't finished; say so if you use them. The failed vibe task is free shipping: 'over £100' became '&gt; 10000' and express went free too. Then cost and context: a third more spend for a worse result. Files read is a wash on this repo - good docs keep both lanes on the right files - so don't oversell it.</a:t>
+              <a:t>BOTH. Eugene switches to the race terminal - the scoreboard prints when both lanes finish (results also saved in demo-kit/results/). Adam reads the rows top-down: they are slide 7's six scorecard measures, correctness first, then cost. The numbers on this slide are from a rehearsal run - the fallback if the live race hasn't finished; say so if you use them. The failed vibe task is free shipping: 'over £100' became '&gt; 10000' and express went free too. Then the QA round: the same failing-check report goes to both lanes; disciplined had nothing to fix, vibe needed a correction in its already-long chat. That rework is in the cost: about twice the spend and 40% more peak context for the same four tickets. Files read is even - good docs kept both lanes on the right files, which is Theory 3 working. Own it; it makes the rest credible.</a:t>
             </a:r>
             <a:endParaRPr lang="en-US" dirty="0"/>
           </a:p>
@@ -13844,7 +13844,7 @@
                   <a:schemeClr val="accent3"/>
                 </a:solidFill>
               </a:rPr>
-              <a:t>Same repository, same model, same three tasks. Only the way we prompt them differs.</a:t>
+              <a:t>Same repository, same model, same four tasks. Only the way we prompt them differs.</a:t>
             </a:r>
             <a:endParaRPr lang="en-US" sz="1500" dirty="0"/>
           </a:p>
@@ -14004,7 +14004,7 @@
                   <a:schemeClr val="accent3"/>
                 </a:solidFill>
               </a:rPr>
-              <a:t>One conversation · three one-line prompts · no files, no constraints, no test command</a:t>
+              <a:t>One conversation · four one-line prompts · no files, no constraints, no test command</a:t>
             </a:r>
             <a:endParaRPr lang="en-US" sz="1400" dirty="0"/>
           </a:p>
@@ -14018,8 +14018,8 @@
         </p:nvSpPr>
         <p:spPr>
           <a:xfrm>
-            <a:off x="5760720" y="2148840"/>
-            <a:ext cx="1737360" cy="548640"/>
+            <a:off x="5669280" y="2148840"/>
+            <a:ext cx="1325880" cy="548640"/>
           </a:xfrm>
           <a:prstGeom prst="roundRect">
             <a:avLst>
@@ -14045,8 +14045,8 @@
         </p:nvSpPr>
         <p:spPr>
           <a:xfrm>
-            <a:off x="5760720" y="2148840"/>
-            <a:ext cx="1737360" cy="548640"/>
+            <a:off x="5669280" y="2148840"/>
+            <a:ext cx="1325880" cy="548640"/>
           </a:xfrm>
           <a:prstGeom prst="rect">
             <a:avLst/>
@@ -14062,14 +14062,14 @@
               <a:buNone/>
             </a:pPr>
             <a:r>
-              <a:rPr lang="en-US" sz="1400" b="1" dirty="0">
+              <a:rPr lang="en-US" sz="1300" b="1" dirty="0">
                 <a:solidFill>
                   <a:schemeClr val="tx1"/>
                 </a:solidFill>
               </a:rPr>
-              <a:t>1  Tax bug</a:t>
-            </a:r>
-            <a:endParaRPr lang="en-US" sz="1400" dirty="0"/>
+              <a:t>Tax bug</a:t>
+            </a:r>
+            <a:endParaRPr lang="en-US" sz="1300" dirty="0"/>
           </a:p>
         </p:txBody>
       </p:sp>
@@ -14081,8 +14081,8 @@
         </p:nvSpPr>
         <p:spPr>
           <a:xfrm>
-            <a:off x="7680960" y="2148840"/>
-            <a:ext cx="1737360" cy="548640"/>
+            <a:off x="7132320" y="2148840"/>
+            <a:ext cx="1325880" cy="548640"/>
           </a:xfrm>
           <a:prstGeom prst="roundRect">
             <a:avLst>
@@ -14108,8 +14108,8 @@
         </p:nvSpPr>
         <p:spPr>
           <a:xfrm>
-            <a:off x="7680960" y="2148840"/>
-            <a:ext cx="1737360" cy="548640"/>
+            <a:off x="7132320" y="2148840"/>
+            <a:ext cx="1325880" cy="548640"/>
           </a:xfrm>
           <a:prstGeom prst="rect">
             <a:avLst/>
@@ -14125,14 +14125,14 @@
               <a:buNone/>
             </a:pPr>
             <a:r>
-              <a:rPr lang="en-US" sz="1400" b="1" dirty="0">
+              <a:rPr lang="en-US" sz="1300" b="1" dirty="0">
                 <a:solidFill>
                   <a:schemeClr val="tx1"/>
                 </a:solidFill>
               </a:rPr>
-              <a:t>3  Free shipping</a:t>
-            </a:r>
-            <a:endParaRPr lang="en-US" sz="1400" dirty="0"/>
+              <a:t>Free shipping</a:t>
+            </a:r>
+            <a:endParaRPr lang="en-US" sz="1300" dirty="0"/>
           </a:p>
         </p:txBody>
       </p:sp>
@@ -14144,8 +14144,8 @@
         </p:nvSpPr>
         <p:spPr>
           <a:xfrm>
-            <a:off x="9601200" y="2148840"/>
-            <a:ext cx="1737360" cy="548640"/>
+            <a:off x="8595360" y="2148840"/>
+            <a:ext cx="1325880" cy="548640"/>
           </a:xfrm>
           <a:prstGeom prst="roundRect">
             <a:avLst>
@@ -14171,8 +14171,8 @@
         </p:nvSpPr>
         <p:spPr>
           <a:xfrm>
-            <a:off x="9601200" y="2148840"/>
-            <a:ext cx="1737360" cy="548640"/>
+            <a:off x="8595360" y="2148840"/>
+            <a:ext cx="1325880" cy="548640"/>
           </a:xfrm>
           <a:prstGeom prst="rect">
             <a:avLst/>
@@ -14188,20 +14188,83 @@
               <a:buNone/>
             </a:pPr>
             <a:r>
-              <a:rPr lang="en-US" sz="1400" b="1" dirty="0">
+              <a:rPr lang="en-US" sz="1300" b="1" dirty="0">
                 <a:solidFill>
                   <a:schemeClr val="tx1"/>
                 </a:solidFill>
               </a:rPr>
-              <a:t>4  Retry limit</a:t>
-            </a:r>
-            <a:endParaRPr lang="en-US" sz="1400" dirty="0"/>
-          </a:p>
-        </p:txBody>
-      </p:sp>
-      <p:sp>
-        <p:nvSpPr>
-          <p:cNvPr id="16" name="panel"/>
+              <a:t>Discount cap</a:t>
+            </a:r>
+            <a:endParaRPr lang="en-US" sz="1300" dirty="0"/>
+          </a:p>
+        </p:txBody>
+      </p:sp>
+      <p:sp>
+        <p:nvSpPr>
+          <p:cNvPr id="16" name="task chip"/>
+          <p:cNvSpPr/>
+          <p:nvPr/>
+        </p:nvSpPr>
+        <p:spPr>
+          <a:xfrm>
+            <a:off x="10058400" y="2148840"/>
+            <a:ext cx="1325880" cy="548640"/>
+          </a:xfrm>
+          <a:prstGeom prst="roundRect">
+            <a:avLst>
+              <a:gd name="adj" fmla="val 13333"/>
+            </a:avLst>
+          </a:prstGeom>
+          <a:solidFill>
+            <a:schemeClr val="bg1"/>
+          </a:solidFill>
+          <a:ln w="15875">
+            <a:solidFill>
+              <a:schemeClr val="accent3"/>
+            </a:solidFill>
+            <a:prstDash val="solid"/>
+          </a:ln>
+        </p:spPr>
+      </p:sp>
+      <p:sp>
+        <p:nvSpPr>
+          <p:cNvPr id="17" name="Text 15"/>
+          <p:cNvSpPr txBox="1"/>
+          <p:nvPr/>
+        </p:nvSpPr>
+        <p:spPr>
+          <a:xfrm>
+            <a:off x="10058400" y="2148840"/>
+            <a:ext cx="1325880" cy="548640"/>
+          </a:xfrm>
+          <a:prstGeom prst="rect">
+            <a:avLst/>
+          </a:prstGeom>
+          <a:noFill/>
+          <a:ln/>
+        </p:spPr>
+        <p:txBody>
+          <a:bodyPr wrap="square" lIns="0" tIns="0" rIns="0" bIns="0" rtlCol="0" anchor="ctr"/>
+          <a:lstStyle/>
+          <a:p>
+            <a:pPr algn="ctr" indent="0" marL="0">
+              <a:buNone/>
+            </a:pPr>
+            <a:r>
+              <a:rPr lang="en-US" sz="1300" b="1" dirty="0">
+                <a:solidFill>
+                  <a:schemeClr val="tx1"/>
+                </a:solidFill>
+              </a:rPr>
+              <a:t>Retry limit</a:t>
+            </a:r>
+            <a:endParaRPr lang="en-US" sz="1300" dirty="0"/>
+          </a:p>
+        </p:txBody>
+      </p:sp>
+      <p:sp>
+        <p:nvSpPr>
+          <p:cNvPr id="18" name="panel"/>
           <p:cNvSpPr/>
           <p:nvPr/>
         </p:nvSpPr>
@@ -14228,7 +14291,7 @@
       </p:sp>
       <p:sp>
         <p:nvSpPr>
-          <p:cNvPr id="17" name="glyph circle"/>
+          <p:cNvPr id="19" name="glyph circle"/>
           <p:cNvSpPr/>
           <p:nvPr/>
         </p:nvSpPr>
@@ -14253,7 +14316,7 @@
       </p:sp>
       <p:sp>
         <p:nvSpPr>
-          <p:cNvPr id="18" name="Text 16"/>
+          <p:cNvPr id="20" name="Text 18"/>
           <p:cNvSpPr txBox="1"/>
           <p:nvPr/>
         </p:nvSpPr>
@@ -14289,7 +14352,7 @@
       </p:sp>
       <p:sp>
         <p:nvSpPr>
-          <p:cNvPr id="19" name="Text 17"/>
+          <p:cNvPr id="21" name="Text 19"/>
           <p:cNvSpPr txBox="1"/>
           <p:nvPr/>
         </p:nvSpPr>
@@ -14325,7 +14388,7 @@
       </p:sp>
       <p:sp>
         <p:nvSpPr>
-          <p:cNvPr id="20" name="Text 18"/>
+          <p:cNvPr id="22" name="Text 20"/>
           <p:cNvSpPr txBox="1"/>
           <p:nvPr/>
         </p:nvSpPr>
@@ -14361,14 +14424,14 @@
       </p:sp>
       <p:sp>
         <p:nvSpPr>
-          <p:cNvPr id="21" name="task chip"/>
+          <p:cNvPr id="23" name="task chip"/>
           <p:cNvSpPr/>
           <p:nvPr/>
         </p:nvSpPr>
         <p:spPr>
           <a:xfrm>
-            <a:off x="5760720" y="3749040"/>
-            <a:ext cx="1737360" cy="548640"/>
+            <a:off x="5669280" y="3749040"/>
+            <a:ext cx="1325880" cy="548640"/>
           </a:xfrm>
           <a:prstGeom prst="roundRect">
             <a:avLst>
@@ -14388,14 +14451,14 @@
       </p:sp>
       <p:sp>
         <p:nvSpPr>
-          <p:cNvPr id="22" name="Text 20"/>
+          <p:cNvPr id="24" name="Text 22"/>
           <p:cNvSpPr txBox="1"/>
           <p:nvPr/>
         </p:nvSpPr>
         <p:spPr>
           <a:xfrm>
-            <a:off x="5760720" y="3749040"/>
-            <a:ext cx="1737360" cy="548640"/>
+            <a:off x="5669280" y="3749040"/>
+            <a:ext cx="1325880" cy="548640"/>
           </a:xfrm>
           <a:prstGeom prst="rect">
             <a:avLst/>
@@ -14411,27 +14474,27 @@
               <a:buNone/>
             </a:pPr>
             <a:r>
-              <a:rPr lang="en-US" sz="1400" b="1" dirty="0">
+              <a:rPr lang="en-US" sz="1300" b="1" dirty="0">
                 <a:solidFill>
                   <a:schemeClr val="tx1"/>
                 </a:solidFill>
               </a:rPr>
-              <a:t>1  Tax bug</a:t>
-            </a:r>
-            <a:endParaRPr lang="en-US" sz="1400" dirty="0"/>
-          </a:p>
-        </p:txBody>
-      </p:sp>
-      <p:sp>
-        <p:nvSpPr>
-          <p:cNvPr id="23" name="task chip"/>
+              <a:t>Tax bug</a:t>
+            </a:r>
+            <a:endParaRPr lang="en-US" sz="1300" dirty="0"/>
+          </a:p>
+        </p:txBody>
+      </p:sp>
+      <p:sp>
+        <p:nvSpPr>
+          <p:cNvPr id="25" name="task chip"/>
           <p:cNvSpPr/>
           <p:nvPr/>
         </p:nvSpPr>
         <p:spPr>
           <a:xfrm>
-            <a:off x="7680960" y="3749040"/>
-            <a:ext cx="1737360" cy="548640"/>
+            <a:off x="7132320" y="3749040"/>
+            <a:ext cx="1325880" cy="548640"/>
           </a:xfrm>
           <a:prstGeom prst="roundRect">
             <a:avLst>
@@ -14451,14 +14514,14 @@
       </p:sp>
       <p:sp>
         <p:nvSpPr>
-          <p:cNvPr id="24" name="Text 22"/>
+          <p:cNvPr id="26" name="Text 24"/>
           <p:cNvSpPr txBox="1"/>
           <p:nvPr/>
         </p:nvSpPr>
         <p:spPr>
           <a:xfrm>
-            <a:off x="7680960" y="3749040"/>
-            <a:ext cx="1737360" cy="548640"/>
+            <a:off x="7132320" y="3749040"/>
+            <a:ext cx="1325880" cy="548640"/>
           </a:xfrm>
           <a:prstGeom prst="rect">
             <a:avLst/>
@@ -14474,27 +14537,27 @@
               <a:buNone/>
             </a:pPr>
             <a:r>
-              <a:rPr lang="en-US" sz="1400" b="1" dirty="0">
+              <a:rPr lang="en-US" sz="1300" b="1" dirty="0">
                 <a:solidFill>
                   <a:schemeClr val="tx1"/>
                 </a:solidFill>
               </a:rPr>
-              <a:t>3  Free shipping</a:t>
-            </a:r>
-            <a:endParaRPr lang="en-US" sz="1400" dirty="0"/>
-          </a:p>
-        </p:txBody>
-      </p:sp>
-      <p:sp>
-        <p:nvSpPr>
-          <p:cNvPr id="25" name="task chip"/>
+              <a:t>Free shipping</a:t>
+            </a:r>
+            <a:endParaRPr lang="en-US" sz="1300" dirty="0"/>
+          </a:p>
+        </p:txBody>
+      </p:sp>
+      <p:sp>
+        <p:nvSpPr>
+          <p:cNvPr id="27" name="task chip"/>
           <p:cNvSpPr/>
           <p:nvPr/>
         </p:nvSpPr>
         <p:spPr>
           <a:xfrm>
-            <a:off x="9601200" y="3749040"/>
-            <a:ext cx="1737360" cy="548640"/>
+            <a:off x="8595360" y="3749040"/>
+            <a:ext cx="1325880" cy="548640"/>
           </a:xfrm>
           <a:prstGeom prst="roundRect">
             <a:avLst>
@@ -14514,14 +14577,14 @@
       </p:sp>
       <p:sp>
         <p:nvSpPr>
-          <p:cNvPr id="26" name="Text 24"/>
+          <p:cNvPr id="28" name="Text 26"/>
           <p:cNvSpPr txBox="1"/>
           <p:nvPr/>
         </p:nvSpPr>
         <p:spPr>
           <a:xfrm>
-            <a:off x="9601200" y="3749040"/>
-            <a:ext cx="1737360" cy="548640"/>
+            <a:off x="8595360" y="3749040"/>
+            <a:ext cx="1325880" cy="548640"/>
           </a:xfrm>
           <a:prstGeom prst="rect">
             <a:avLst/>
@@ -14537,20 +14600,83 @@
               <a:buNone/>
             </a:pPr>
             <a:r>
-              <a:rPr lang="en-US" sz="1400" b="1" dirty="0">
+              <a:rPr lang="en-US" sz="1300" b="1" dirty="0">
                 <a:solidFill>
                   <a:schemeClr val="tx1"/>
                 </a:solidFill>
               </a:rPr>
-              <a:t>4  Retry limit</a:t>
-            </a:r>
-            <a:endParaRPr lang="en-US" sz="1400" dirty="0"/>
-          </a:p>
-        </p:txBody>
-      </p:sp>
-      <p:sp>
-        <p:nvSpPr>
-          <p:cNvPr id="27" name="panel"/>
+              <a:t>Discount cap</a:t>
+            </a:r>
+            <a:endParaRPr lang="en-US" sz="1300" dirty="0"/>
+          </a:p>
+        </p:txBody>
+      </p:sp>
+      <p:sp>
+        <p:nvSpPr>
+          <p:cNvPr id="29" name="task chip"/>
+          <p:cNvSpPr/>
+          <p:nvPr/>
+        </p:nvSpPr>
+        <p:spPr>
+          <a:xfrm>
+            <a:off x="10058400" y="3749040"/>
+            <a:ext cx="1325880" cy="548640"/>
+          </a:xfrm>
+          <a:prstGeom prst="roundRect">
+            <a:avLst>
+              <a:gd name="adj" fmla="val 13333"/>
+            </a:avLst>
+          </a:prstGeom>
+          <a:solidFill>
+            <a:schemeClr val="bg1"/>
+          </a:solidFill>
+          <a:ln w="15875">
+            <a:solidFill>
+              <a:schemeClr val="accent2"/>
+            </a:solidFill>
+            <a:prstDash val="solid"/>
+          </a:ln>
+        </p:spPr>
+      </p:sp>
+      <p:sp>
+        <p:nvSpPr>
+          <p:cNvPr id="30" name="Text 28"/>
+          <p:cNvSpPr txBox="1"/>
+          <p:nvPr/>
+        </p:nvSpPr>
+        <p:spPr>
+          <a:xfrm>
+            <a:off x="10058400" y="3749040"/>
+            <a:ext cx="1325880" cy="548640"/>
+          </a:xfrm>
+          <a:prstGeom prst="rect">
+            <a:avLst/>
+          </a:prstGeom>
+          <a:noFill/>
+          <a:ln/>
+        </p:spPr>
+        <p:txBody>
+          <a:bodyPr wrap="square" lIns="0" tIns="0" rIns="0" bIns="0" rtlCol="0" anchor="ctr"/>
+          <a:lstStyle/>
+          <a:p>
+            <a:pPr algn="ctr" indent="0" marL="0">
+              <a:buNone/>
+            </a:pPr>
+            <a:r>
+              <a:rPr lang="en-US" sz="1300" b="1" dirty="0">
+                <a:solidFill>
+                  <a:schemeClr val="tx1"/>
+                </a:solidFill>
+              </a:rPr>
+              <a:t>Retry limit</a:t>
+            </a:r>
+            <a:endParaRPr lang="en-US" sz="1300" dirty="0"/>
+          </a:p>
+        </p:txBody>
+      </p:sp>
+      <p:sp>
+        <p:nvSpPr>
+          <p:cNvPr id="31" name="panel"/>
           <p:cNvSpPr/>
           <p:nvPr/>
         </p:nvSpPr>
@@ -14577,7 +14703,7 @@
       </p:sp>
       <p:sp>
         <p:nvSpPr>
-          <p:cNvPr id="28" name="Text 26"/>
+          <p:cNvPr id="32" name="Text 30"/>
           <p:cNvSpPr txBox="1"/>
           <p:nvPr/>
         </p:nvSpPr>
@@ -14605,7 +14731,7 @@
                   <a:schemeClr val="tx2"/>
                 </a:solidFill>
               </a:rPr>
-              <a:t>We will not look at it again until minute 54. Then we read the scoreboard together.</a:t>
+              <a:t>Then a QA round: any failed check goes back to that lane once, like a real QA ticket. We read the scoreboard at minute 54.</a:t>
             </a:r>
             <a:endParaRPr lang="en-US" sz="1500" dirty="0"/>
           </a:p>
@@ -17580,7 +17706,7 @@
                   <a:schemeClr val="accent3"/>
                 </a:solidFill>
               </a:rPr>
-              <a:t>Same model, same repo, same three tasks. Live numbers from the race terminal; rehearsal numbers below.</a:t>
+              <a:t>Same model, same repo, same four tasks, then one QA round. Live numbers from the race terminal; rehearsal numbers below.</a:t>
             </a:r>
             <a:endParaRPr lang="en-US" sz="1500" dirty="0"/>
           </a:p>
@@ -17613,7 +17739,7 @@
                 <a:gridCol w="1828800"/>
                 <a:gridCol w="1828800"/>
               </a:tblGrid>
-              <a:tr h="457200">
+              <a:tr h="420624">
                 <a:tc>
                   <a:txBody>
                     <a:bodyPr/>
@@ -17798,7 +17924,7 @@
                   </a:tcPr>
                 </a:tc>
               </a:tr>
-              <a:tr h="457200">
+              <a:tr h="420624">
                 <a:tc>
                   <a:txBody>
                     <a:bodyPr/>
@@ -17813,7 +17939,7 @@
                             <a:schemeClr val="tx1"/>
                           </a:solidFill>
                         </a:rPr>
-                        <a:t>Hidden verification passed</a:t>
+                        <a:t>Hidden verification passed, first try</a:t>
                       </a:r>
                       <a:endParaRPr lang="en-US" sz="1400" dirty="0"/>
                     </a:p>
@@ -17871,7 +17997,7 @@
                             <a:schemeClr val="tx1"/>
                           </a:solidFill>
                         </a:rPr>
-                        <a:t>2 / 3</a:t>
+                        <a:t>3 / 4</a:t>
                       </a:r>
                       <a:endParaRPr lang="en-US" sz="1400" dirty="0"/>
                     </a:p>
@@ -17929,7 +18055,7 @@
                             <a:schemeClr val="tx1"/>
                           </a:solidFill>
                         </a:rPr>
-                        <a:t>3 / 3</a:t>
+                        <a:t>4 / 4</a:t>
                       </a:r>
                       <a:endParaRPr lang="en-US" sz="1400" dirty="0"/>
                     </a:p>
@@ -17974,7 +18100,183 @@
                   </a:tcPr>
                 </a:tc>
               </a:tr>
-              <a:tr h="457200">
+              <a:tr h="420624">
+                <a:tc>
+                  <a:txBody>
+                    <a:bodyPr/>
+                    <a:lstStyle/>
+                    <a:p>
+                      <a:pPr indent="0" marL="0">
+                        <a:buNone/>
+                      </a:pPr>
+                      <a:r>
+                        <a:rPr lang="en-US" sz="1400" b="1" dirty="0">
+                          <a:solidFill>
+                            <a:schemeClr val="tx1"/>
+                          </a:solidFill>
+                        </a:rPr>
+                        <a:t>...after one QA round</a:t>
+                      </a:r>
+                      <a:endParaRPr lang="en-US" sz="1400" dirty="0"/>
+                    </a:p>
+                  </a:txBody>
+                  <a:tcPr marL="128016" marR="128016" marT="36576" marB="36576" anchor="ctr">
+                    <a:lnL w="12700" cap="flat" cmpd="sng" algn="ctr">
+                      <a:solidFill>
+                        <a:srgbClr val="EAF0F4"/>
+                      </a:solidFill>
+                      <a:prstDash val="solid"/>
+                      <a:round/>
+                      <a:headEnd type="none" w="med" len="med"/>
+                      <a:tailEnd type="none" w="med" len="med"/>
+                    </a:lnL>
+                    <a:lnR w="12700" cap="flat" cmpd="sng" algn="ctr">
+                      <a:solidFill>
+                        <a:srgbClr val="EAF0F4"/>
+                      </a:solidFill>
+                      <a:prstDash val="solid"/>
+                      <a:round/>
+                      <a:headEnd type="none" w="med" len="med"/>
+                      <a:tailEnd type="none" w="med" len="med"/>
+                    </a:lnR>
+                    <a:lnT w="12700" cap="flat" cmpd="sng" algn="ctr">
+                      <a:solidFill>
+                        <a:srgbClr val="EAF0F4"/>
+                      </a:solidFill>
+                      <a:prstDash val="solid"/>
+                      <a:round/>
+                      <a:headEnd type="none" w="med" len="med"/>
+                      <a:tailEnd type="none" w="med" len="med"/>
+                    </a:lnT>
+                    <a:lnB w="12700" cap="flat" cmpd="sng" algn="ctr">
+                      <a:solidFill>
+                        <a:srgbClr val="EAF0F4"/>
+                      </a:solidFill>
+                      <a:prstDash val="solid"/>
+                      <a:round/>
+                      <a:headEnd type="none" w="med" len="med"/>
+                      <a:tailEnd type="none" w="med" len="med"/>
+                    </a:lnB>
+                  </a:tcPr>
+                </a:tc>
+                <a:tc>
+                  <a:txBody>
+                    <a:bodyPr/>
+                    <a:lstStyle/>
+                    <a:p>
+                      <a:pPr algn="ctr" indent="0" marL="0">
+                        <a:buNone/>
+                      </a:pPr>
+                      <a:r>
+                        <a:rPr lang="en-US" sz="1400" dirty="0">
+                          <a:solidFill>
+                            <a:schemeClr val="tx1"/>
+                          </a:solidFill>
+                        </a:rPr>
+                        <a:t>4 / 4</a:t>
+                      </a:r>
+                      <a:endParaRPr lang="en-US" sz="1400" dirty="0"/>
+                    </a:p>
+                  </a:txBody>
+                  <a:tcPr marL="128016" marR="128016" marT="36576" marB="36576" anchor="ctr">
+                    <a:lnL w="12700" cap="flat" cmpd="sng" algn="ctr">
+                      <a:solidFill>
+                        <a:srgbClr val="EAF0F4"/>
+                      </a:solidFill>
+                      <a:prstDash val="solid"/>
+                      <a:round/>
+                      <a:headEnd type="none" w="med" len="med"/>
+                      <a:tailEnd type="none" w="med" len="med"/>
+                    </a:lnL>
+                    <a:lnR w="12700" cap="flat" cmpd="sng" algn="ctr">
+                      <a:solidFill>
+                        <a:srgbClr val="EAF0F4"/>
+                      </a:solidFill>
+                      <a:prstDash val="solid"/>
+                      <a:round/>
+                      <a:headEnd type="none" w="med" len="med"/>
+                      <a:tailEnd type="none" w="med" len="med"/>
+                    </a:lnR>
+                    <a:lnT w="12700" cap="flat" cmpd="sng" algn="ctr">
+                      <a:solidFill>
+                        <a:srgbClr val="EAF0F4"/>
+                      </a:solidFill>
+                      <a:prstDash val="solid"/>
+                      <a:round/>
+                      <a:headEnd type="none" w="med" len="med"/>
+                      <a:tailEnd type="none" w="med" len="med"/>
+                    </a:lnT>
+                    <a:lnB w="12700" cap="flat" cmpd="sng" algn="ctr">
+                      <a:solidFill>
+                        <a:srgbClr val="EAF0F4"/>
+                      </a:solidFill>
+                      <a:prstDash val="solid"/>
+                      <a:round/>
+                      <a:headEnd type="none" w="med" len="med"/>
+                      <a:tailEnd type="none" w="med" len="med"/>
+                    </a:lnB>
+                  </a:tcPr>
+                </a:tc>
+                <a:tc>
+                  <a:txBody>
+                    <a:bodyPr/>
+                    <a:lstStyle/>
+                    <a:p>
+                      <a:pPr algn="ctr" indent="0" marL="0">
+                        <a:buNone/>
+                      </a:pPr>
+                      <a:r>
+                        <a:rPr lang="en-US" sz="1400" dirty="0">
+                          <a:solidFill>
+                            <a:schemeClr val="tx1"/>
+                          </a:solidFill>
+                        </a:rPr>
+                        <a:t>4 / 4</a:t>
+                      </a:r>
+                      <a:endParaRPr lang="en-US" sz="1400" dirty="0"/>
+                    </a:p>
+                  </a:txBody>
+                  <a:tcPr marL="128016" marR="128016" marT="36576" marB="36576" anchor="ctr">
+                    <a:lnL w="12700" cap="flat" cmpd="sng" algn="ctr">
+                      <a:solidFill>
+                        <a:srgbClr val="EAF0F4"/>
+                      </a:solidFill>
+                      <a:prstDash val="solid"/>
+                      <a:round/>
+                      <a:headEnd type="none" w="med" len="med"/>
+                      <a:tailEnd type="none" w="med" len="med"/>
+                    </a:lnL>
+                    <a:lnR w="12700" cap="flat" cmpd="sng" algn="ctr">
+                      <a:solidFill>
+                        <a:srgbClr val="EAF0F4"/>
+                      </a:solidFill>
+                      <a:prstDash val="solid"/>
+                      <a:round/>
+                      <a:headEnd type="none" w="med" len="med"/>
+                      <a:tailEnd type="none" w="med" len="med"/>
+                    </a:lnR>
+                    <a:lnT w="12700" cap="flat" cmpd="sng" algn="ctr">
+                      <a:solidFill>
+                        <a:srgbClr val="EAF0F4"/>
+                      </a:solidFill>
+                      <a:prstDash val="solid"/>
+                      <a:round/>
+                      <a:headEnd type="none" w="med" len="med"/>
+                      <a:tailEnd type="none" w="med" len="med"/>
+                    </a:lnT>
+                    <a:lnB w="12700" cap="flat" cmpd="sng" algn="ctr">
+                      <a:solidFill>
+                        <a:srgbClr val="EAF0F4"/>
+                      </a:solidFill>
+                      <a:prstDash val="solid"/>
+                      <a:round/>
+                      <a:headEnd type="none" w="med" len="med"/>
+                      <a:tailEnd type="none" w="med" len="med"/>
+                    </a:lnB>
+                  </a:tcPr>
+                </a:tc>
+              </a:tr>
+              <a:tr h="420624">
                 <a:tc>
                   <a:txBody>
                     <a:bodyPr/>
@@ -18047,7 +18349,7 @@
                             <a:schemeClr val="tx1"/>
                           </a:solidFill>
                         </a:rPr>
-                        <a:t>7 / 7</a:t>
+                        <a:t>9 / 9</a:t>
                       </a:r>
                       <a:endParaRPr lang="en-US" sz="1400" dirty="0"/>
                     </a:p>
@@ -18105,7 +18407,7 @@
                             <a:schemeClr val="tx1"/>
                           </a:solidFill>
                         </a:rPr>
-                        <a:t>9 / 8</a:t>
+                        <a:t>11 / 10</a:t>
                       </a:r>
                       <a:endParaRPr lang="en-US" sz="1400" dirty="0"/>
                     </a:p>
@@ -18150,7 +18452,7 @@
                   </a:tcPr>
                 </a:tc>
               </a:tr>
-              <a:tr h="457200">
+              <a:tr h="420624">
                 <a:tc>
                   <a:txBody>
                     <a:bodyPr/>
@@ -18223,7 +18525,7 @@
                             <a:schemeClr val="tx1"/>
                           </a:solidFill>
                         </a:rPr>
-                        <a:t>3 (0)</a:t>
+                        <a:t>5 (1)</a:t>
                       </a:r>
                       <a:endParaRPr lang="en-US" sz="1400" dirty="0"/>
                     </a:p>
@@ -18281,7 +18583,7 @@
                             <a:schemeClr val="tx1"/>
                           </a:solidFill>
                         </a:rPr>
-                        <a:t>3 (0)</a:t>
+                        <a:t>4 (0)</a:t>
                       </a:r>
                       <a:endParaRPr lang="en-US" sz="1400" dirty="0"/>
                     </a:p>
@@ -18326,7 +18628,7 @@
                   </a:tcPr>
                 </a:tc>
               </a:tr>
-              <a:tr h="457200">
+              <a:tr h="420624">
                 <a:tc>
                   <a:txBody>
                     <a:bodyPr/>
@@ -18399,7 +18701,7 @@
                             <a:schemeClr val="tx1"/>
                           </a:solidFill>
                         </a:rPr>
-                        <a:t>5 / 0</a:t>
+                        <a:t>5 / 1</a:t>
                       </a:r>
                       <a:endParaRPr lang="en-US" sz="1400" dirty="0"/>
                     </a:p>
@@ -18457,7 +18759,7 @@
                             <a:schemeClr val="tx1"/>
                           </a:solidFill>
                         </a:rPr>
-                        <a:t>0 / 3</a:t>
+                        <a:t>0 / 4</a:t>
                       </a:r>
                       <a:endParaRPr lang="en-US" sz="1400" dirty="0"/>
                     </a:p>
@@ -18502,7 +18804,7 @@
                   </a:tcPr>
                 </a:tc>
               </a:tr>
-              <a:tr h="457200">
+              <a:tr h="420624">
                 <a:tc>
                   <a:txBody>
                     <a:bodyPr/>
@@ -18575,7 +18877,7 @@
                             <a:schemeClr val="tx1"/>
                           </a:solidFill>
                         </a:rPr>
-                        <a:t>1</a:t>
+                        <a:t>0</a:t>
                       </a:r>
                       <a:endParaRPr lang="en-US" sz="1400" dirty="0"/>
                     </a:p>
@@ -18633,7 +18935,7 @@
                             <a:schemeClr val="tx1"/>
                           </a:solidFill>
                         </a:rPr>
-                        <a:t>1</a:t>
+                        <a:t>0</a:t>
                       </a:r>
                       <a:endParaRPr lang="en-US" sz="1400" dirty="0"/>
                     </a:p>
@@ -18678,7 +18980,7 @@
                   </a:tcPr>
                 </a:tc>
               </a:tr>
-              <a:tr h="457200">
+              <a:tr h="420624">
                 <a:tc>
                   <a:txBody>
                     <a:bodyPr/>
@@ -18751,7 +19053,7 @@
                             <a:schemeClr val="tx1"/>
                           </a:solidFill>
                         </a:rPr>
-                        <a:t>60.0k</a:t>
+                        <a:t>68.7k</a:t>
                       </a:r>
                       <a:endParaRPr lang="en-US" sz="1400" dirty="0"/>
                     </a:p>
@@ -18809,7 +19111,7 @@
                             <a:schemeClr val="tx1"/>
                           </a:solidFill>
                         </a:rPr>
-                        <a:t>51.3k</a:t>
+                        <a:t>49.2k</a:t>
                       </a:r>
                       <a:endParaRPr lang="en-US" sz="1400" dirty="0"/>
                     </a:p>
@@ -18854,7 +19156,7 @@
                   </a:tcPr>
                 </a:tc>
               </a:tr>
-              <a:tr h="457200">
+              <a:tr h="420624">
                 <a:tc>
                   <a:txBody>
                     <a:bodyPr/>
@@ -18869,7 +19171,7 @@
                             <a:schemeClr val="tx1"/>
                           </a:solidFill>
                         </a:rPr>
-                        <a:t>Cost · tokens processed</a:t>
+                        <a:t>Cost, incl. rework</a:t>
                       </a:r>
                       <a:endParaRPr lang="en-US" sz="1400" dirty="0"/>
                     </a:p>
@@ -18927,7 +19229,7 @@
                             <a:schemeClr val="tx1"/>
                           </a:solidFill>
                         </a:rPr>
-                        <a:t>$0.90 · 907k</a:t>
+                        <a:t>$1.50</a:t>
                       </a:r>
                       <a:endParaRPr lang="en-US" sz="1400" dirty="0"/>
                     </a:p>
@@ -18985,7 +19287,7 @@
                             <a:schemeClr val="tx1"/>
                           </a:solidFill>
                         </a:rPr>
-                        <a:t>$0.60 · 729k</a:t>
+                        <a:t>$0.72</a:t>
                       </a:r>
                       <a:endParaRPr lang="en-US" sz="1400" dirty="0"/>
                     </a:p>
@@ -19030,7 +19332,7 @@
                   </a:tcPr>
                 </a:tc>
               </a:tr>
-              <a:tr h="457200">
+              <a:tr h="420624">
                 <a:tc>
                   <a:txBody>
                     <a:bodyPr/>
@@ -19103,7 +19405,7 @@
                             <a:schemeClr val="tx1"/>
                           </a:solidFill>
                         </a:rPr>
-                        <a:t>2.2</a:t>
+                        <a:t>3.0</a:t>
                       </a:r>
                       <a:endParaRPr lang="en-US" sz="1400" dirty="0"/>
                     </a:p>
@@ -19161,7 +19463,7 @@
                             <a:schemeClr val="tx1"/>
                           </a:solidFill>
                         </a:rPr>
-                        <a:t>1.7</a:t>
+                        <a:t>2.1</a:t>
                       </a:r>
                       <a:endParaRPr lang="en-US" sz="1400" dirty="0"/>
                     </a:p>
@@ -19212,7 +19514,43 @@
       </p:graphicFrame>
       <p:sp>
         <p:nvSpPr>
-          <p:cNvPr id="6" name="panel"/>
+          <p:cNvPr id="6" name="Text 3"/>
+          <p:cNvSpPr txBox="1"/>
+          <p:nvPr/>
+        </p:nvSpPr>
+        <p:spPr>
+          <a:xfrm>
+            <a:off x="640080" y="5943600"/>
+            <a:ext cx="7498080" cy="274320"/>
+          </a:xfrm>
+          <a:prstGeom prst="rect">
+            <a:avLst/>
+          </a:prstGeom>
+          <a:noFill/>
+          <a:ln/>
+        </p:spPr>
+        <p:txBody>
+          <a:bodyPr wrap="square" lIns="0" tIns="0" rIns="0" bIns="0" rtlCol="0" anchor="t"/>
+          <a:lstStyle/>
+          <a:p>
+            <a:pPr indent="0" marL="0">
+              <a:buNone/>
+            </a:pPr>
+            <a:r>
+              <a:rPr lang="en-US" sz="1200" i="1" dirty="0">
+                <a:solidFill>
+                  <a:schemeClr val="accent6"/>
+                </a:solidFill>
+              </a:rPr>
+              <a:t>Files read is even: good docs kept both lanes on the right files (Theory 3).</a:t>
+            </a:r>
+            <a:endParaRPr lang="en-US" sz="1200" dirty="0"/>
+          </a:p>
+        </p:txBody>
+      </p:sp>
+      <p:sp>
+        <p:nvSpPr>
+          <p:cNvPr id="7" name="panel"/>
           <p:cNvSpPr/>
           <p:nvPr/>
         </p:nvSpPr>
@@ -19239,7 +19577,7 @@
       </p:sp>
       <p:sp>
         <p:nvSpPr>
-          <p:cNvPr id="7" name="glyph circle"/>
+          <p:cNvPr id="8" name="glyph circle"/>
           <p:cNvSpPr/>
           <p:nvPr/>
         </p:nvSpPr>
@@ -19264,7 +19602,7 @@
       </p:sp>
       <p:sp>
         <p:nvSpPr>
-          <p:cNvPr id="8" name="Text 5"/>
+          <p:cNvPr id="9" name="Text 6"/>
           <p:cNvSpPr txBox="1"/>
           <p:nvPr/>
         </p:nvSpPr>
@@ -19300,7 +19638,7 @@
       </p:sp>
       <p:sp>
         <p:nvSpPr>
-          <p:cNvPr id="9" name="Text 6"/>
+          <p:cNvPr id="10" name="Text 7"/>
           <p:cNvSpPr txBox="1"/>
           <p:nvPr/>
         </p:nvSpPr>
@@ -19336,7 +19674,7 @@
       </p:sp>
       <p:sp>
         <p:nvSpPr>
-          <p:cNvPr id="10" name="Text 7"/>
+          <p:cNvPr id="11" name="Text 8"/>
           <p:cNvSpPr txBox="1"/>
           <p:nvPr/>
         </p:nvSpPr>
@@ -19372,7 +19710,7 @@
       </p:sp>
       <p:sp>
         <p:nvSpPr>
-          <p:cNvPr id="11" name="Text 8"/>
+          <p:cNvPr id="12" name="Text 9"/>
           <p:cNvSpPr txBox="1"/>
           <p:nvPr/>
         </p:nvSpPr>
